--- a/videos/machine-learning/03_ridger_regression_gradient_descent/recreated_pptx/slide_048_recreated.pptx
+++ b/videos/machine-learning/03_ridger_regression_gradient_descent/recreated_pptx/slide_048_recreated.pptx
@@ -1053,1373 +1053,1686 @@
           </a:ln>
         </p:spPr>
       </p:sp>
-      <p:graphicFrame>
-        <p:nvGraphicFramePr>
-          <p:cNvPr id="2" name="Table 0"/>
-          <p:cNvGraphicFramePr>
-            <a:graphicFrameLocks noGrp="1"/>
-          </p:cNvGraphicFramePr>
-          <p:nvPr>
-            <p:extLst>
-              <p:ext uri="{D42A27DB-BD31-4B8C-83A1-F6EECF244321}">
-                <p14:modId xmlns:p14="http://schemas.microsoft.com/office/powerpoint/2010/main" val="1579011935"/>
-              </p:ext>
-            </p:extLst>
-          </p:nvPr>
-        </p:nvGraphicFramePr>
-        <p:xfrm>
-          <a:off x="1079500" y="812800"/>
-          <a:ext cx="1701800" cy="774700"/>
-        </p:xfrm>
-        <a:graphic>
-          <a:graphicData uri="http://schemas.openxmlformats.org/drawingml/2006/table">
-            <a:tbl>
-              <a:tblPr/>
-              <a:tblGrid>
-                <a:gridCol w="283633"/>
-                <a:gridCol w="283633"/>
-                <a:gridCol w="283633"/>
-                <a:gridCol w="283633"/>
-                <a:gridCol w="283633"/>
-                <a:gridCol w="283633"/>
-              </a:tblGrid>
-              <a:tr h="152400">
-                <a:tc>
-                  <a:txBody>
-                    <a:bodyPr/>
-                    <a:lstStyle/>
-                    <a:p>
-                      <a:pPr algn="ctr" indent="0" marL="0">
-                        <a:buNone/>
-                      </a:pPr>
-                      <a:r>
-                        <a:rPr lang="en-US" sz="1200" b="1" dirty="0">
-                          <a:solidFill>
-                            <a:srgbClr val="000000"/>
-                          </a:solidFill>
-                          <a:latin typeface="Arial" pitchFamily="34" charset="0"/>
-                          <a:ea typeface="Arial" pitchFamily="34" charset="-122"/>
-                          <a:cs typeface="Arial" pitchFamily="34" charset="-120"/>
-                        </a:rPr>
-                        <a:t>x₁</a:t>
-                      </a:r>
-                      <a:endParaRPr lang="en-US" sz="1200" dirty="0">
-                        <a:latin typeface="Arial" charset="0"/>
-                        <a:ea typeface="Arial" charset="0"/>
-                        <a:cs typeface="Arial" charset="0"/>
-                      </a:endParaRPr>
-                    </a:p>
-                  </a:txBody>
-                  <a:tcPr marL="0" marR="0" marT="0" marB="0" anchor="ctr">
-                    <a:lnL w="0" cap="flat" cmpd="sng" algn="ctr">
-                      <a:noFill/>
-                    </a:lnL>
-                    <a:lnR w="0" cap="flat" cmpd="sng" algn="ctr">
-                      <a:noFill/>
-                    </a:lnR>
-                    <a:lnT w="0" cap="flat" cmpd="sng" algn="ctr">
-                      <a:noFill/>
-                    </a:lnT>
-                    <a:lnB w="0" cap="flat" cmpd="sng" algn="ctr">
-                      <a:noFill/>
-                    </a:lnB>
-                    <a:solidFill>
-                      <a:srgbClr val="FFFFFF"/>
-                    </a:solidFill>
-                  </a:tcPr>
-                </a:tc>
-                <a:tc>
-                  <a:txBody>
-                    <a:bodyPr/>
-                    <a:lstStyle/>
-                    <a:p>
-                      <a:pPr algn="ctr" indent="0" marL="0">
-                        <a:buNone/>
-                      </a:pPr>
-                      <a:r>
-                        <a:rPr lang="en-US" sz="1200" b="1" dirty="0">
-                          <a:solidFill>
-                            <a:srgbClr val="000000"/>
-                          </a:solidFill>
-                          <a:latin typeface="Arial" pitchFamily="34" charset="0"/>
-                          <a:ea typeface="Arial" pitchFamily="34" charset="-122"/>
-                          <a:cs typeface="Arial" pitchFamily="34" charset="-120"/>
-                        </a:rPr>
-                        <a:t>x₂</a:t>
-                      </a:r>
-                      <a:endParaRPr lang="en-US" sz="1200" dirty="0">
-                        <a:latin typeface="Arial" charset="0"/>
-                        <a:ea typeface="Arial" charset="0"/>
-                        <a:cs typeface="Arial" charset="0"/>
-                      </a:endParaRPr>
-                    </a:p>
-                  </a:txBody>
-                  <a:tcPr marL="0" marR="0" marT="0" marB="0" anchor="ctr">
-                    <a:lnL w="0" cap="flat" cmpd="sng" algn="ctr">
-                      <a:noFill/>
-                    </a:lnL>
-                    <a:lnR w="0" cap="flat" cmpd="sng" algn="ctr">
-                      <a:noFill/>
-                    </a:lnR>
-                    <a:lnT w="0" cap="flat" cmpd="sng" algn="ctr">
-                      <a:noFill/>
-                    </a:lnT>
-                    <a:lnB w="0" cap="flat" cmpd="sng" algn="ctr">
-                      <a:noFill/>
-                    </a:lnB>
-                    <a:solidFill>
-                      <a:srgbClr val="FFFFFF"/>
-                    </a:solidFill>
-                  </a:tcPr>
-                </a:tc>
-                <a:tc>
-                  <a:txBody>
-                    <a:bodyPr/>
-                    <a:lstStyle/>
-                    <a:p>
-                      <a:pPr algn="ctr" indent="0" marL="0">
-                        <a:buNone/>
-                      </a:pPr>
-                      <a:r>
-                        <a:rPr lang="en-US" sz="1200" b="1" dirty="0">
-                          <a:solidFill>
-                            <a:srgbClr val="000000"/>
-                          </a:solidFill>
-                          <a:latin typeface="Arial" pitchFamily="34" charset="0"/>
-                          <a:ea typeface="Arial" pitchFamily="34" charset="-122"/>
-                          <a:cs typeface="Arial" pitchFamily="34" charset="-120"/>
-                        </a:rPr>
-                        <a:t>x₃</a:t>
-                      </a:r>
-                      <a:endParaRPr lang="en-US" sz="1200" dirty="0">
-                        <a:latin typeface="Arial" charset="0"/>
-                        <a:ea typeface="Arial" charset="0"/>
-                        <a:cs typeface="Arial" charset="0"/>
-                      </a:endParaRPr>
-                    </a:p>
-                  </a:txBody>
-                  <a:tcPr marL="0" marR="0" marT="0" marB="0" anchor="ctr">
-                    <a:lnL w="0" cap="flat" cmpd="sng" algn="ctr">
-                      <a:noFill/>
-                    </a:lnL>
-                    <a:lnR w="0" cap="flat" cmpd="sng" algn="ctr">
-                      <a:noFill/>
-                    </a:lnR>
-                    <a:lnT w="0" cap="flat" cmpd="sng" algn="ctr">
-                      <a:noFill/>
-                    </a:lnT>
-                    <a:lnB w="0" cap="flat" cmpd="sng" algn="ctr">
-                      <a:noFill/>
-                    </a:lnB>
-                    <a:solidFill>
-                      <a:srgbClr val="FFFFFF"/>
-                    </a:solidFill>
-                  </a:tcPr>
-                </a:tc>
-                <a:tc>
-                  <a:txBody>
-                    <a:bodyPr/>
-                    <a:lstStyle/>
-                    <a:p>
-                      <a:pPr algn="ctr" indent="0" marL="0">
-                        <a:buNone/>
-                      </a:pPr>
-                      <a:r>
-                        <a:rPr lang="en-US" sz="1200" b="1" dirty="0">
-                          <a:solidFill>
-                            <a:srgbClr val="000000"/>
-                          </a:solidFill>
-                          <a:latin typeface="Arial" pitchFamily="34" charset="0"/>
-                          <a:ea typeface="Arial" pitchFamily="34" charset="-122"/>
-                          <a:cs typeface="Arial" pitchFamily="34" charset="-120"/>
-                        </a:rPr>
-                        <a:t>x₄</a:t>
-                      </a:r>
-                      <a:endParaRPr lang="en-US" sz="1200" dirty="0">
-                        <a:latin typeface="Arial" charset="0"/>
-                        <a:ea typeface="Arial" charset="0"/>
-                        <a:cs typeface="Arial" charset="0"/>
-                      </a:endParaRPr>
-                    </a:p>
-                  </a:txBody>
-                  <a:tcPr marL="0" marR="0" marT="0" marB="0" anchor="ctr">
-                    <a:lnL w="0" cap="flat" cmpd="sng" algn="ctr">
-                      <a:noFill/>
-                    </a:lnL>
-                    <a:lnR w="0" cap="flat" cmpd="sng" algn="ctr">
-                      <a:noFill/>
-                    </a:lnR>
-                    <a:lnT w="0" cap="flat" cmpd="sng" algn="ctr">
-                      <a:noFill/>
-                    </a:lnT>
-                    <a:lnB w="0" cap="flat" cmpd="sng" algn="ctr">
-                      <a:noFill/>
-                    </a:lnB>
-                    <a:solidFill>
-                      <a:srgbClr val="FFFFFF"/>
-                    </a:solidFill>
-                  </a:tcPr>
-                </a:tc>
-                <a:tc>
-                  <a:txBody>
-                    <a:bodyPr/>
-                    <a:lstStyle/>
-                    <a:p>
-                      <a:pPr algn="ctr" indent="0" marL="0">
-                        <a:buNone/>
-                      </a:pPr>
-                      <a:r>
-                        <a:rPr lang="en-US" sz="1200" b="1" dirty="0">
-                          <a:solidFill>
-                            <a:srgbClr val="000000"/>
-                          </a:solidFill>
-                          <a:latin typeface="Arial" pitchFamily="34" charset="0"/>
-                          <a:ea typeface="Arial" pitchFamily="34" charset="-122"/>
-                          <a:cs typeface="Arial" pitchFamily="34" charset="-120"/>
-                        </a:rPr>
-                        <a:t>x₅</a:t>
-                      </a:r>
-                      <a:endParaRPr lang="en-US" sz="1200" dirty="0">
-                        <a:latin typeface="Arial" charset="0"/>
-                        <a:ea typeface="Arial" charset="0"/>
-                        <a:cs typeface="Arial" charset="0"/>
-                      </a:endParaRPr>
-                    </a:p>
-                  </a:txBody>
-                  <a:tcPr marL="0" marR="0" marT="0" marB="0" anchor="ctr">
-                    <a:lnL w="0" cap="flat" cmpd="sng" algn="ctr">
-                      <a:noFill/>
-                    </a:lnL>
-                    <a:lnR w="0" cap="flat" cmpd="sng" algn="ctr">
-                      <a:noFill/>
-                    </a:lnR>
-                    <a:lnT w="0" cap="flat" cmpd="sng" algn="ctr">
-                      <a:noFill/>
-                    </a:lnT>
-                    <a:lnB w="0" cap="flat" cmpd="sng" algn="ctr">
-                      <a:noFill/>
-                    </a:lnB>
-                    <a:solidFill>
-                      <a:srgbClr val="FFFFFF"/>
-                    </a:solidFill>
-                  </a:tcPr>
-                </a:tc>
-                <a:tc>
-                  <a:txBody>
-                    <a:bodyPr/>
-                    <a:lstStyle/>
-                    <a:p>
-                      <a:pPr algn="ctr" indent="0" marL="0">
-                        <a:buNone/>
-                      </a:pPr>
-                      <a:r>
-                        <a:rPr lang="en-US" sz="1200" b="1" dirty="0">
-                          <a:solidFill>
-                            <a:srgbClr val="000000"/>
-                          </a:solidFill>
-                          <a:latin typeface="Arial" pitchFamily="34" charset="0"/>
-                          <a:ea typeface="Arial" pitchFamily="34" charset="-122"/>
-                          <a:cs typeface="Arial" pitchFamily="34" charset="-120"/>
-                        </a:rPr>
-                        <a:t>x₆</a:t>
-                      </a:r>
-                      <a:endParaRPr lang="en-US" sz="1200" dirty="0">
-                        <a:latin typeface="Arial" charset="0"/>
-                        <a:ea typeface="Arial" charset="0"/>
-                        <a:cs typeface="Arial" charset="0"/>
-                      </a:endParaRPr>
-                    </a:p>
-                  </a:txBody>
-                  <a:tcPr marL="0" marR="0" marT="0" marB="0" anchor="ctr">
-                    <a:lnL w="0" cap="flat" cmpd="sng" algn="ctr">
-                      <a:noFill/>
-                    </a:lnL>
-                    <a:lnR w="0" cap="flat" cmpd="sng" algn="ctr">
-                      <a:noFill/>
-                    </a:lnR>
-                    <a:lnT w="0" cap="flat" cmpd="sng" algn="ctr">
-                      <a:noFill/>
-                    </a:lnT>
-                    <a:lnB w="0" cap="flat" cmpd="sng" algn="ctr">
-                      <a:noFill/>
-                    </a:lnB>
-                    <a:solidFill>
-                      <a:srgbClr val="FFFFFF"/>
-                    </a:solidFill>
-                  </a:tcPr>
-                </a:tc>
-              </a:tr>
-              <a:tr h="152400">
-                <a:tc>
-                  <a:txBody>
-                    <a:bodyPr/>
-                    <a:lstStyle/>
-                    <a:p>
-                      <a:pPr algn="ctr" indent="0" marL="0">
-                        <a:buNone/>
-                      </a:pPr>
-                      <a:r>
-                        <a:rPr lang="en-US" sz="1200" dirty="0">
-                          <a:solidFill>
-                            <a:srgbClr val="000000"/>
-                          </a:solidFill>
-                          <a:latin typeface="Arial" pitchFamily="34" charset="0"/>
-                          <a:ea typeface="Arial" pitchFamily="34" charset="-122"/>
-                          <a:cs typeface="Arial" pitchFamily="34" charset="-120"/>
-                        </a:rPr>
-                        <a:t>1</a:t>
-                      </a:r>
-                      <a:endParaRPr lang="en-US" sz="1200" dirty="0">
-                        <a:latin typeface="Arial" charset="0"/>
-                        <a:ea typeface="Arial" charset="0"/>
-                        <a:cs typeface="Arial" charset="0"/>
-                      </a:endParaRPr>
-                    </a:p>
-                  </a:txBody>
-                  <a:tcPr marL="0" marR="0" marT="0" marB="0" anchor="ctr">
-                    <a:lnL w="0" cap="flat" cmpd="sng" algn="ctr">
-                      <a:noFill/>
-                    </a:lnL>
-                    <a:lnR w="0" cap="flat" cmpd="sng" algn="ctr">
-                      <a:noFill/>
-                    </a:lnR>
-                    <a:lnT w="0" cap="flat" cmpd="sng" algn="ctr">
-                      <a:noFill/>
-                    </a:lnT>
-                    <a:lnB w="0" cap="flat" cmpd="sng" algn="ctr">
-                      <a:noFill/>
-                    </a:lnB>
-                    <a:solidFill>
-                      <a:srgbClr val="FFFFFF"/>
-                    </a:solidFill>
-                  </a:tcPr>
-                </a:tc>
-                <a:tc>
-                  <a:txBody>
-                    <a:bodyPr/>
-                    <a:lstStyle/>
-                    <a:p>
-                      <a:pPr algn="ctr" indent="0" marL="0">
-                        <a:buNone/>
-                      </a:pPr>
-                      <a:r>
-                        <a:rPr lang="en-US" sz="1200" dirty="0">
-                          <a:solidFill>
-                            <a:srgbClr val="000000"/>
-                          </a:solidFill>
-                          <a:latin typeface="Arial" pitchFamily="34" charset="0"/>
-                          <a:ea typeface="Arial" pitchFamily="34" charset="-122"/>
-                          <a:cs typeface="Arial" pitchFamily="34" charset="-120"/>
-                        </a:rPr>
-                        <a:t>2</a:t>
-                      </a:r>
-                      <a:endParaRPr lang="en-US" sz="1200" dirty="0">
-                        <a:latin typeface="Arial" charset="0"/>
-                        <a:ea typeface="Arial" charset="0"/>
-                        <a:cs typeface="Arial" charset="0"/>
-                      </a:endParaRPr>
-                    </a:p>
-                  </a:txBody>
-                  <a:tcPr marL="0" marR="0" marT="0" marB="0" anchor="ctr">
-                    <a:lnL w="0" cap="flat" cmpd="sng" algn="ctr">
-                      <a:noFill/>
-                    </a:lnL>
-                    <a:lnR w="0" cap="flat" cmpd="sng" algn="ctr">
-                      <a:noFill/>
-                    </a:lnR>
-                    <a:lnT w="0" cap="flat" cmpd="sng" algn="ctr">
-                      <a:noFill/>
-                    </a:lnT>
-                    <a:lnB w="0" cap="flat" cmpd="sng" algn="ctr">
-                      <a:noFill/>
-                    </a:lnB>
-                    <a:solidFill>
-                      <a:srgbClr val="FFFFFF"/>
-                    </a:solidFill>
-                  </a:tcPr>
-                </a:tc>
-                <a:tc>
-                  <a:txBody>
-                    <a:bodyPr/>
-                    <a:lstStyle/>
-                    <a:p>
-                      <a:pPr algn="ctr" indent="0" marL="0">
-                        <a:buNone/>
-                      </a:pPr>
-                      <a:r>
-                        <a:rPr lang="en-US" sz="1200" dirty="0">
-                          <a:solidFill>
-                            <a:srgbClr val="000000"/>
-                          </a:solidFill>
-                          <a:latin typeface="Arial" pitchFamily="34" charset="0"/>
-                          <a:ea typeface="Arial" pitchFamily="34" charset="-122"/>
-                          <a:cs typeface="Arial" pitchFamily="34" charset="-120"/>
-                        </a:rPr>
-                        <a:t>1</a:t>
-                      </a:r>
-                      <a:endParaRPr lang="en-US" sz="1200" dirty="0">
-                        <a:latin typeface="Arial" charset="0"/>
-                        <a:ea typeface="Arial" charset="0"/>
-                        <a:cs typeface="Arial" charset="0"/>
-                      </a:endParaRPr>
-                    </a:p>
-                  </a:txBody>
-                  <a:tcPr marL="0" marR="0" marT="0" marB="0" anchor="ctr">
-                    <a:lnL w="0" cap="flat" cmpd="sng" algn="ctr">
-                      <a:noFill/>
-                    </a:lnL>
-                    <a:lnR w="0" cap="flat" cmpd="sng" algn="ctr">
-                      <a:noFill/>
-                    </a:lnR>
-                    <a:lnT w="0" cap="flat" cmpd="sng" algn="ctr">
-                      <a:noFill/>
-                    </a:lnT>
-                    <a:lnB w="0" cap="flat" cmpd="sng" algn="ctr">
-                      <a:noFill/>
-                    </a:lnB>
-                    <a:solidFill>
-                      <a:srgbClr val="FFFFFF"/>
-                    </a:solidFill>
-                  </a:tcPr>
-                </a:tc>
-                <a:tc>
-                  <a:txBody>
-                    <a:bodyPr/>
-                    <a:lstStyle/>
-                    <a:p>
-                      <a:pPr algn="ctr" indent="0" marL="0">
-                        <a:buNone/>
-                      </a:pPr>
-                      <a:r>
-                        <a:rPr lang="en-US" sz="1200" dirty="0">
-                          <a:solidFill>
-                            <a:srgbClr val="000000"/>
-                          </a:solidFill>
-                          <a:latin typeface="Arial" pitchFamily="34" charset="0"/>
-                          <a:ea typeface="Arial" pitchFamily="34" charset="-122"/>
-                          <a:cs typeface="Arial" pitchFamily="34" charset="-120"/>
-                        </a:rPr>
-                        <a:t>5</a:t>
-                      </a:r>
-                      <a:endParaRPr lang="en-US" sz="1200" dirty="0">
-                        <a:latin typeface="Arial" charset="0"/>
-                        <a:ea typeface="Arial" charset="0"/>
-                        <a:cs typeface="Arial" charset="0"/>
-                      </a:endParaRPr>
-                    </a:p>
-                  </a:txBody>
-                  <a:tcPr marL="0" marR="0" marT="0" marB="0" anchor="ctr">
-                    <a:lnL w="0" cap="flat" cmpd="sng" algn="ctr">
-                      <a:noFill/>
-                    </a:lnL>
-                    <a:lnR w="0" cap="flat" cmpd="sng" algn="ctr">
-                      <a:noFill/>
-                    </a:lnR>
-                    <a:lnT w="0" cap="flat" cmpd="sng" algn="ctr">
-                      <a:noFill/>
-                    </a:lnT>
-                    <a:lnB w="0" cap="flat" cmpd="sng" algn="ctr">
-                      <a:noFill/>
-                    </a:lnB>
-                    <a:solidFill>
-                      <a:srgbClr val="FFFFFF"/>
-                    </a:solidFill>
-                  </a:tcPr>
-                </a:tc>
-                <a:tc>
-                  <a:txBody>
-                    <a:bodyPr/>
-                    <a:lstStyle/>
-                    <a:p>
-                      <a:pPr algn="ctr" indent="0" marL="0">
-                        <a:buNone/>
-                      </a:pPr>
-                      <a:r>
-                        <a:rPr lang="en-US" sz="1200" dirty="0">
-                          <a:solidFill>
-                            <a:srgbClr val="000000"/>
-                          </a:solidFill>
-                          <a:latin typeface="Arial" pitchFamily="34" charset="0"/>
-                          <a:ea typeface="Arial" pitchFamily="34" charset="-122"/>
-                          <a:cs typeface="Arial" pitchFamily="34" charset="-120"/>
-                        </a:rPr>
-                        <a:t>6</a:t>
-                      </a:r>
-                      <a:endParaRPr lang="en-US" sz="1200" dirty="0">
-                        <a:latin typeface="Arial" charset="0"/>
-                        <a:ea typeface="Arial" charset="0"/>
-                        <a:cs typeface="Arial" charset="0"/>
-                      </a:endParaRPr>
-                    </a:p>
-                  </a:txBody>
-                  <a:tcPr marL="0" marR="0" marT="0" marB="0" anchor="ctr">
-                    <a:lnL w="0" cap="flat" cmpd="sng" algn="ctr">
-                      <a:noFill/>
-                    </a:lnL>
-                    <a:lnR w="0" cap="flat" cmpd="sng" algn="ctr">
-                      <a:noFill/>
-                    </a:lnR>
-                    <a:lnT w="0" cap="flat" cmpd="sng" algn="ctr">
-                      <a:noFill/>
-                    </a:lnT>
-                    <a:lnB w="0" cap="flat" cmpd="sng" algn="ctr">
-                      <a:noFill/>
-                    </a:lnB>
-                    <a:solidFill>
-                      <a:srgbClr val="FFFFFF"/>
-                    </a:solidFill>
-                  </a:tcPr>
-                </a:tc>
-                <a:tc>
-                  <a:txBody>
-                    <a:bodyPr/>
-                    <a:lstStyle/>
-                    <a:p>
-                      <a:pPr algn="ctr" indent="0" marL="0">
-                        <a:buNone/>
-                      </a:pPr>
-                      <a:r>
-                        <a:rPr lang="en-US" sz="1200" dirty="0">
-                          <a:solidFill>
-                            <a:srgbClr val="000000"/>
-                          </a:solidFill>
-                          <a:latin typeface="Arial" pitchFamily="34" charset="0"/>
-                          <a:ea typeface="Arial" pitchFamily="34" charset="-122"/>
-                          <a:cs typeface="Arial" pitchFamily="34" charset="-120"/>
-                        </a:rPr>
-                        <a:t>6</a:t>
-                      </a:r>
-                      <a:endParaRPr lang="en-US" sz="1200" dirty="0">
-                        <a:latin typeface="Arial" charset="0"/>
-                        <a:ea typeface="Arial" charset="0"/>
-                        <a:cs typeface="Arial" charset="0"/>
-                      </a:endParaRPr>
-                    </a:p>
-                  </a:txBody>
-                  <a:tcPr marL="0" marR="0" marT="0" marB="0" anchor="ctr">
-                    <a:lnL w="0" cap="flat" cmpd="sng" algn="ctr">
-                      <a:noFill/>
-                    </a:lnL>
-                    <a:lnR w="0" cap="flat" cmpd="sng" algn="ctr">
-                      <a:noFill/>
-                    </a:lnR>
-                    <a:lnT w="0" cap="flat" cmpd="sng" algn="ctr">
-                      <a:noFill/>
-                    </a:lnT>
-                    <a:lnB w="0" cap="flat" cmpd="sng" algn="ctr">
-                      <a:noFill/>
-                    </a:lnB>
-                    <a:solidFill>
-                      <a:srgbClr val="FFFFFF"/>
-                    </a:solidFill>
-                  </a:tcPr>
-                </a:tc>
-              </a:tr>
-              <a:tr h="152400">
-                <a:tc>
-                  <a:txBody>
-                    <a:bodyPr/>
-                    <a:lstStyle/>
-                    <a:p>
-                      <a:pPr algn="ctr" indent="0" marL="0">
-                        <a:buNone/>
-                      </a:pPr>
-                      <a:r>
-                        <a:rPr lang="en-US" sz="1200" dirty="0">
-                          <a:solidFill>
-                            <a:srgbClr val="000000"/>
-                          </a:solidFill>
-                          <a:latin typeface="Arial" pitchFamily="34" charset="0"/>
-                          <a:ea typeface="Arial" pitchFamily="34" charset="-122"/>
-                          <a:cs typeface="Arial" pitchFamily="34" charset="-120"/>
-                        </a:rPr>
-                        <a:t>1</a:t>
-                      </a:r>
-                      <a:endParaRPr lang="en-US" sz="1200" dirty="0">
-                        <a:latin typeface="Arial" charset="0"/>
-                        <a:ea typeface="Arial" charset="0"/>
-                        <a:cs typeface="Arial" charset="0"/>
-                      </a:endParaRPr>
-                    </a:p>
-                  </a:txBody>
-                  <a:tcPr marL="0" marR="0" marT="0" marB="0" anchor="ctr">
-                    <a:lnL w="0" cap="flat" cmpd="sng" algn="ctr">
-                      <a:noFill/>
-                    </a:lnL>
-                    <a:lnR w="0" cap="flat" cmpd="sng" algn="ctr">
-                      <a:noFill/>
-                    </a:lnR>
-                    <a:lnT w="0" cap="flat" cmpd="sng" algn="ctr">
-                      <a:noFill/>
-                    </a:lnT>
-                    <a:lnB w="0" cap="flat" cmpd="sng" algn="ctr">
-                      <a:noFill/>
-                    </a:lnB>
-                    <a:solidFill>
-                      <a:srgbClr val="FFFFFF"/>
-                    </a:solidFill>
-                  </a:tcPr>
-                </a:tc>
-                <a:tc>
-                  <a:txBody>
-                    <a:bodyPr/>
-                    <a:lstStyle/>
-                    <a:p>
-                      <a:pPr algn="ctr" indent="0" marL="0">
-                        <a:buNone/>
-                      </a:pPr>
-                      <a:r>
-                        <a:rPr lang="en-US" sz="1200" dirty="0">
-                          <a:solidFill>
-                            <a:srgbClr val="000000"/>
-                          </a:solidFill>
-                          <a:latin typeface="Arial" pitchFamily="34" charset="0"/>
-                          <a:ea typeface="Arial" pitchFamily="34" charset="-122"/>
-                          <a:cs typeface="Arial" pitchFamily="34" charset="-120"/>
-                        </a:rPr>
-                        <a:t>1</a:t>
-                      </a:r>
-                      <a:endParaRPr lang="en-US" sz="1200" dirty="0">
-                        <a:latin typeface="Arial" charset="0"/>
-                        <a:ea typeface="Arial" charset="0"/>
-                        <a:cs typeface="Arial" charset="0"/>
-                      </a:endParaRPr>
-                    </a:p>
-                  </a:txBody>
-                  <a:tcPr marL="0" marR="0" marT="0" marB="0" anchor="ctr">
-                    <a:lnL w="0" cap="flat" cmpd="sng" algn="ctr">
-                      <a:noFill/>
-                    </a:lnL>
-                    <a:lnR w="0" cap="flat" cmpd="sng" algn="ctr">
-                      <a:noFill/>
-                    </a:lnR>
-                    <a:lnT w="0" cap="flat" cmpd="sng" algn="ctr">
-                      <a:noFill/>
-                    </a:lnT>
-                    <a:lnB w="0" cap="flat" cmpd="sng" algn="ctr">
-                      <a:noFill/>
-                    </a:lnB>
-                    <a:solidFill>
-                      <a:srgbClr val="FFFFFF"/>
-                    </a:solidFill>
-                  </a:tcPr>
-                </a:tc>
-                <a:tc>
-                  <a:txBody>
-                    <a:bodyPr/>
-                    <a:lstStyle/>
-                    <a:p>
-                      <a:pPr algn="ctr" indent="0" marL="0">
-                        <a:buNone/>
-                      </a:pPr>
-                      <a:r>
-                        <a:rPr lang="en-US" sz="1200" dirty="0">
-                          <a:solidFill>
-                            <a:srgbClr val="000000"/>
-                          </a:solidFill>
-                          <a:latin typeface="Arial" pitchFamily="34" charset="0"/>
-                          <a:ea typeface="Arial" pitchFamily="34" charset="-122"/>
-                          <a:cs typeface="Arial" pitchFamily="34" charset="-120"/>
-                        </a:rPr>
-                        <a:t>2</a:t>
-                      </a:r>
-                      <a:endParaRPr lang="en-US" sz="1200" dirty="0">
-                        <a:latin typeface="Arial" charset="0"/>
-                        <a:ea typeface="Arial" charset="0"/>
-                        <a:cs typeface="Arial" charset="0"/>
-                      </a:endParaRPr>
-                    </a:p>
-                  </a:txBody>
-                  <a:tcPr marL="0" marR="0" marT="0" marB="0" anchor="ctr">
-                    <a:lnL w="0" cap="flat" cmpd="sng" algn="ctr">
-                      <a:noFill/>
-                    </a:lnL>
-                    <a:lnR w="0" cap="flat" cmpd="sng" algn="ctr">
-                      <a:noFill/>
-                    </a:lnR>
-                    <a:lnT w="0" cap="flat" cmpd="sng" algn="ctr">
-                      <a:noFill/>
-                    </a:lnT>
-                    <a:lnB w="0" cap="flat" cmpd="sng" algn="ctr">
-                      <a:noFill/>
-                    </a:lnB>
-                    <a:solidFill>
-                      <a:srgbClr val="FFFFFF"/>
-                    </a:solidFill>
-                  </a:tcPr>
-                </a:tc>
-                <a:tc>
-                  <a:txBody>
-                    <a:bodyPr/>
-                    <a:lstStyle/>
-                    <a:p>
-                      <a:pPr algn="ctr" indent="0" marL="0">
-                        <a:buNone/>
-                      </a:pPr>
-                      <a:r>
-                        <a:rPr lang="en-US" sz="1200" dirty="0">
-                          <a:solidFill>
-                            <a:srgbClr val="000000"/>
-                          </a:solidFill>
-                          <a:latin typeface="Arial" pitchFamily="34" charset="0"/>
-                          <a:ea typeface="Arial" pitchFamily="34" charset="-122"/>
-                          <a:cs typeface="Arial" pitchFamily="34" charset="-120"/>
-                        </a:rPr>
-                        <a:t>4</a:t>
-                      </a:r>
-                      <a:endParaRPr lang="en-US" sz="1200" dirty="0">
-                        <a:latin typeface="Arial" charset="0"/>
-                        <a:ea typeface="Arial" charset="0"/>
-                        <a:cs typeface="Arial" charset="0"/>
-                      </a:endParaRPr>
-                    </a:p>
-                  </a:txBody>
-                  <a:tcPr marL="0" marR="0" marT="0" marB="0" anchor="ctr">
-                    <a:lnL w="0" cap="flat" cmpd="sng" algn="ctr">
-                      <a:noFill/>
-                    </a:lnL>
-                    <a:lnR w="0" cap="flat" cmpd="sng" algn="ctr">
-                      <a:noFill/>
-                    </a:lnR>
-                    <a:lnT w="0" cap="flat" cmpd="sng" algn="ctr">
-                      <a:noFill/>
-                    </a:lnT>
-                    <a:lnB w="0" cap="flat" cmpd="sng" algn="ctr">
-                      <a:noFill/>
-                    </a:lnB>
-                    <a:solidFill>
-                      <a:srgbClr val="FFFFFF"/>
-                    </a:solidFill>
-                  </a:tcPr>
-                </a:tc>
-                <a:tc>
-                  <a:txBody>
-                    <a:bodyPr/>
-                    <a:lstStyle/>
-                    <a:p>
-                      <a:pPr algn="ctr" indent="0" marL="0">
-                        <a:buNone/>
-                      </a:pPr>
-                      <a:r>
-                        <a:rPr lang="en-US" sz="1200" dirty="0">
-                          <a:solidFill>
-                            <a:srgbClr val="000000"/>
-                          </a:solidFill>
-                          <a:latin typeface="Arial" pitchFamily="34" charset="0"/>
-                          <a:ea typeface="Arial" pitchFamily="34" charset="-122"/>
-                          <a:cs typeface="Arial" pitchFamily="34" charset="-120"/>
-                        </a:rPr>
-                        <a:t>5</a:t>
-                      </a:r>
-                      <a:endParaRPr lang="en-US" sz="1200" dirty="0">
-                        <a:latin typeface="Arial" charset="0"/>
-                        <a:ea typeface="Arial" charset="0"/>
-                        <a:cs typeface="Arial" charset="0"/>
-                      </a:endParaRPr>
-                    </a:p>
-                  </a:txBody>
-                  <a:tcPr marL="0" marR="0" marT="0" marB="0" anchor="ctr">
-                    <a:lnL w="0" cap="flat" cmpd="sng" algn="ctr">
-                      <a:noFill/>
-                    </a:lnL>
-                    <a:lnR w="0" cap="flat" cmpd="sng" algn="ctr">
-                      <a:noFill/>
-                    </a:lnR>
-                    <a:lnT w="0" cap="flat" cmpd="sng" algn="ctr">
-                      <a:noFill/>
-                    </a:lnT>
-                    <a:lnB w="0" cap="flat" cmpd="sng" algn="ctr">
-                      <a:noFill/>
-                    </a:lnB>
-                    <a:solidFill>
-                      <a:srgbClr val="FFFFFF"/>
-                    </a:solidFill>
-                  </a:tcPr>
-                </a:tc>
-                <a:tc>
-                  <a:txBody>
-                    <a:bodyPr/>
-                    <a:lstStyle/>
-                    <a:p>
-                      <a:pPr algn="ctr" indent="0" marL="0">
-                        <a:buNone/>
-                      </a:pPr>
-                      <a:r>
-                        <a:rPr lang="en-US" sz="1200" dirty="0">
-                          <a:solidFill>
-                            <a:srgbClr val="000000"/>
-                          </a:solidFill>
-                          <a:latin typeface="Arial" pitchFamily="34" charset="0"/>
-                          <a:ea typeface="Arial" pitchFamily="34" charset="-122"/>
-                          <a:cs typeface="Arial" pitchFamily="34" charset="-120"/>
-                        </a:rPr>
-                        <a:t>6</a:t>
-                      </a:r>
-                      <a:endParaRPr lang="en-US" sz="1200" dirty="0">
-                        <a:latin typeface="Arial" charset="0"/>
-                        <a:ea typeface="Arial" charset="0"/>
-                        <a:cs typeface="Arial" charset="0"/>
-                      </a:endParaRPr>
-                    </a:p>
-                  </a:txBody>
-                  <a:tcPr marL="0" marR="0" marT="0" marB="0" anchor="ctr">
-                    <a:lnL w="0" cap="flat" cmpd="sng" algn="ctr">
-                      <a:noFill/>
-                    </a:lnL>
-                    <a:lnR w="0" cap="flat" cmpd="sng" algn="ctr">
-                      <a:noFill/>
-                    </a:lnR>
-                    <a:lnT w="0" cap="flat" cmpd="sng" algn="ctr">
-                      <a:noFill/>
-                    </a:lnT>
-                    <a:lnB w="0" cap="flat" cmpd="sng" algn="ctr">
-                      <a:noFill/>
-                    </a:lnB>
-                    <a:solidFill>
-                      <a:srgbClr val="FFFFFF"/>
-                    </a:solidFill>
-                  </a:tcPr>
-                </a:tc>
-              </a:tr>
-              <a:tr h="152400">
-                <a:tc>
-                  <a:txBody>
-                    <a:bodyPr/>
-                    <a:lstStyle/>
-                    <a:p>
-                      <a:pPr algn="ctr" indent="0" marL="0">
-                        <a:buNone/>
-                      </a:pPr>
-                      <a:r>
-                        <a:rPr lang="en-US" sz="1200" dirty="0">
-                          <a:solidFill>
-                            <a:srgbClr val="000000"/>
-                          </a:solidFill>
-                          <a:latin typeface="Arial" pitchFamily="34" charset="0"/>
-                          <a:ea typeface="Arial" pitchFamily="34" charset="-122"/>
-                          <a:cs typeface="Arial" pitchFamily="34" charset="-120"/>
-                        </a:rPr>
-                        <a:t>1</a:t>
-                      </a:r>
-                      <a:endParaRPr lang="en-US" sz="1200" dirty="0">
-                        <a:latin typeface="Arial" charset="0"/>
-                        <a:ea typeface="Arial" charset="0"/>
-                        <a:cs typeface="Arial" charset="0"/>
-                      </a:endParaRPr>
-                    </a:p>
-                  </a:txBody>
-                  <a:tcPr marL="0" marR="0" marT="0" marB="0" anchor="ctr">
-                    <a:lnL w="0" cap="flat" cmpd="sng" algn="ctr">
-                      <a:noFill/>
-                    </a:lnL>
-                    <a:lnR w="0" cap="flat" cmpd="sng" algn="ctr">
-                      <a:noFill/>
-                    </a:lnR>
-                    <a:lnT w="0" cap="flat" cmpd="sng" algn="ctr">
-                      <a:noFill/>
-                    </a:lnT>
-                    <a:lnB w="0" cap="flat" cmpd="sng" algn="ctr">
-                      <a:noFill/>
-                    </a:lnB>
-                    <a:solidFill>
-                      <a:srgbClr val="FFFFFF"/>
-                    </a:solidFill>
-                  </a:tcPr>
-                </a:tc>
-                <a:tc>
-                  <a:txBody>
-                    <a:bodyPr/>
-                    <a:lstStyle/>
-                    <a:p>
-                      <a:pPr algn="ctr" indent="0" marL="0">
-                        <a:buNone/>
-                      </a:pPr>
-                      <a:r>
-                        <a:rPr lang="en-US" sz="1200" dirty="0">
-                          <a:solidFill>
-                            <a:srgbClr val="000000"/>
-                          </a:solidFill>
-                          <a:latin typeface="Arial" pitchFamily="34" charset="0"/>
-                          <a:ea typeface="Arial" pitchFamily="34" charset="-122"/>
-                          <a:cs typeface="Arial" pitchFamily="34" charset="-120"/>
-                        </a:rPr>
-                        <a:t>2</a:t>
-                      </a:r>
-                      <a:endParaRPr lang="en-US" sz="1200" dirty="0">
-                        <a:latin typeface="Arial" charset="0"/>
-                        <a:ea typeface="Arial" charset="0"/>
-                        <a:cs typeface="Arial" charset="0"/>
-                      </a:endParaRPr>
-                    </a:p>
-                  </a:txBody>
-                  <a:tcPr marL="0" marR="0" marT="0" marB="0" anchor="ctr">
-                    <a:lnL w="0" cap="flat" cmpd="sng" algn="ctr">
-                      <a:noFill/>
-                    </a:lnL>
-                    <a:lnR w="0" cap="flat" cmpd="sng" algn="ctr">
-                      <a:noFill/>
-                    </a:lnR>
-                    <a:lnT w="0" cap="flat" cmpd="sng" algn="ctr">
-                      <a:noFill/>
-                    </a:lnT>
-                    <a:lnB w="0" cap="flat" cmpd="sng" algn="ctr">
-                      <a:noFill/>
-                    </a:lnB>
-                    <a:solidFill>
-                      <a:srgbClr val="FFFFFF"/>
-                    </a:solidFill>
-                  </a:tcPr>
-                </a:tc>
-                <a:tc>
-                  <a:txBody>
-                    <a:bodyPr/>
-                    <a:lstStyle/>
-                    <a:p>
-                      <a:pPr algn="ctr" indent="0" marL="0">
-                        <a:buNone/>
-                      </a:pPr>
-                      <a:r>
-                        <a:rPr lang="en-US" sz="1200" dirty="0">
-                          <a:solidFill>
-                            <a:srgbClr val="000000"/>
-                          </a:solidFill>
-                          <a:latin typeface="Arial" pitchFamily="34" charset="0"/>
-                          <a:ea typeface="Arial" pitchFamily="34" charset="-122"/>
-                          <a:cs typeface="Arial" pitchFamily="34" charset="-120"/>
-                        </a:rPr>
-                        <a:t>2</a:t>
-                      </a:r>
-                      <a:endParaRPr lang="en-US" sz="1200" dirty="0">
-                        <a:latin typeface="Arial" charset="0"/>
-                        <a:ea typeface="Arial" charset="0"/>
-                        <a:cs typeface="Arial" charset="0"/>
-                      </a:endParaRPr>
-                    </a:p>
-                  </a:txBody>
-                  <a:tcPr marL="0" marR="0" marT="0" marB="0" anchor="ctr">
-                    <a:lnL w="0" cap="flat" cmpd="sng" algn="ctr">
-                      <a:noFill/>
-                    </a:lnL>
-                    <a:lnR w="0" cap="flat" cmpd="sng" algn="ctr">
-                      <a:noFill/>
-                    </a:lnR>
-                    <a:lnT w="0" cap="flat" cmpd="sng" algn="ctr">
-                      <a:noFill/>
-                    </a:lnT>
-                    <a:lnB w="0" cap="flat" cmpd="sng" algn="ctr">
-                      <a:noFill/>
-                    </a:lnB>
-                    <a:solidFill>
-                      <a:srgbClr val="FFFFFF"/>
-                    </a:solidFill>
-                  </a:tcPr>
-                </a:tc>
-                <a:tc>
-                  <a:txBody>
-                    <a:bodyPr/>
-                    <a:lstStyle/>
-                    <a:p>
-                      <a:pPr algn="ctr" indent="0" marL="0">
-                        <a:buNone/>
-                      </a:pPr>
-                      <a:r>
-                        <a:rPr lang="en-US" sz="1200" dirty="0">
-                          <a:solidFill>
-                            <a:srgbClr val="000000"/>
-                          </a:solidFill>
-                          <a:latin typeface="Arial" pitchFamily="34" charset="0"/>
-                          <a:ea typeface="Arial" pitchFamily="34" charset="-122"/>
-                          <a:cs typeface="Arial" pitchFamily="34" charset="-120"/>
-                        </a:rPr>
-                        <a:t>4</a:t>
-                      </a:r>
-                      <a:endParaRPr lang="en-US" sz="1200" dirty="0">
-                        <a:latin typeface="Arial" charset="0"/>
-                        <a:ea typeface="Arial" charset="0"/>
-                        <a:cs typeface="Arial" charset="0"/>
-                      </a:endParaRPr>
-                    </a:p>
-                  </a:txBody>
-                  <a:tcPr marL="0" marR="0" marT="0" marB="0" anchor="ctr">
-                    <a:lnL w="0" cap="flat" cmpd="sng" algn="ctr">
-                      <a:noFill/>
-                    </a:lnL>
-                    <a:lnR w="0" cap="flat" cmpd="sng" algn="ctr">
-                      <a:noFill/>
-                    </a:lnR>
-                    <a:lnT w="0" cap="flat" cmpd="sng" algn="ctr">
-                      <a:noFill/>
-                    </a:lnT>
-                    <a:lnB w="0" cap="flat" cmpd="sng" algn="ctr">
-                      <a:noFill/>
-                    </a:lnB>
-                    <a:solidFill>
-                      <a:srgbClr val="FFFFFF"/>
-                    </a:solidFill>
-                  </a:tcPr>
-                </a:tc>
-                <a:tc>
-                  <a:txBody>
-                    <a:bodyPr/>
-                    <a:lstStyle/>
-                    <a:p>
-                      <a:pPr algn="ctr" indent="0" marL="0">
-                        <a:buNone/>
-                      </a:pPr>
-                      <a:r>
-                        <a:rPr lang="en-US" sz="1200" dirty="0">
-                          <a:solidFill>
-                            <a:srgbClr val="000000"/>
-                          </a:solidFill>
-                          <a:latin typeface="Arial" pitchFamily="34" charset="0"/>
-                          <a:ea typeface="Arial" pitchFamily="34" charset="-122"/>
-                          <a:cs typeface="Arial" pitchFamily="34" charset="-120"/>
-                        </a:rPr>
-                        <a:t>5</a:t>
-                      </a:r>
-                      <a:endParaRPr lang="en-US" sz="1200" dirty="0">
-                        <a:latin typeface="Arial" charset="0"/>
-                        <a:ea typeface="Arial" charset="0"/>
-                        <a:cs typeface="Arial" charset="0"/>
-                      </a:endParaRPr>
-                    </a:p>
-                  </a:txBody>
-                  <a:tcPr marL="0" marR="0" marT="0" marB="0" anchor="ctr">
-                    <a:lnL w="0" cap="flat" cmpd="sng" algn="ctr">
-                      <a:noFill/>
-                    </a:lnL>
-                    <a:lnR w="0" cap="flat" cmpd="sng" algn="ctr">
-                      <a:noFill/>
-                    </a:lnR>
-                    <a:lnT w="0" cap="flat" cmpd="sng" algn="ctr">
-                      <a:noFill/>
-                    </a:lnT>
-                    <a:lnB w="0" cap="flat" cmpd="sng" algn="ctr">
-                      <a:noFill/>
-                    </a:lnB>
-                    <a:solidFill>
-                      <a:srgbClr val="FFFFFF"/>
-                    </a:solidFill>
-                  </a:tcPr>
-                </a:tc>
-                <a:tc>
-                  <a:txBody>
-                    <a:bodyPr/>
-                    <a:lstStyle/>
-                    <a:p>
-                      <a:pPr algn="ctr" indent="0" marL="0">
-                        <a:buNone/>
-                      </a:pPr>
-                      <a:r>
-                        <a:rPr lang="en-US" sz="1200" dirty="0">
-                          <a:solidFill>
-                            <a:srgbClr val="000000"/>
-                          </a:solidFill>
-                          <a:latin typeface="Arial" pitchFamily="34" charset="0"/>
-                          <a:ea typeface="Arial" pitchFamily="34" charset="-122"/>
-                          <a:cs typeface="Arial" pitchFamily="34" charset="-120"/>
-                        </a:rPr>
-                        <a:t>6</a:t>
-                      </a:r>
-                      <a:endParaRPr lang="en-US" sz="1200" dirty="0">
-                        <a:latin typeface="Arial" charset="0"/>
-                        <a:ea typeface="Arial" charset="0"/>
-                        <a:cs typeface="Arial" charset="0"/>
-                      </a:endParaRPr>
-                    </a:p>
-                  </a:txBody>
-                  <a:tcPr marL="0" marR="0" marT="0" marB="0" anchor="ctr">
-                    <a:lnL w="0" cap="flat" cmpd="sng" algn="ctr">
-                      <a:noFill/>
-                    </a:lnL>
-                    <a:lnR w="0" cap="flat" cmpd="sng" algn="ctr">
-                      <a:noFill/>
-                    </a:lnR>
-                    <a:lnT w="0" cap="flat" cmpd="sng" algn="ctr">
-                      <a:noFill/>
-                    </a:lnT>
-                    <a:lnB w="0" cap="flat" cmpd="sng" algn="ctr">
-                      <a:noFill/>
-                    </a:lnB>
-                    <a:solidFill>
-                      <a:srgbClr val="FFFFFF"/>
-                    </a:solidFill>
-                  </a:tcPr>
-                </a:tc>
-              </a:tr>
-              <a:tr h="152400">
-                <a:tc>
-                  <a:txBody>
-                    <a:bodyPr/>
-                    <a:lstStyle/>
-                    <a:p>
-                      <a:pPr algn="ctr" indent="0" marL="0">
-                        <a:buNone/>
-                      </a:pPr>
-                      <a:r>
-                        <a:rPr lang="en-US" sz="1200" b="1" dirty="0">
-                          <a:solidFill>
-                            <a:srgbClr val="FF0000"/>
-                          </a:solidFill>
-                          <a:latin typeface="Arial" pitchFamily="34" charset="0"/>
-                          <a:ea typeface="Arial" pitchFamily="34" charset="-122"/>
-                          <a:cs typeface="Arial" pitchFamily="34" charset="-120"/>
-                        </a:rPr>
-                        <a:t>C1</a:t>
-                      </a:r>
-                      <a:endParaRPr lang="en-US" sz="1200" dirty="0">
-                        <a:latin typeface="Arial" charset="0"/>
-                        <a:ea typeface="Arial" charset="0"/>
-                        <a:cs typeface="Arial" charset="0"/>
-                      </a:endParaRPr>
-                    </a:p>
-                  </a:txBody>
-                  <a:tcPr marL="0" marR="0" marT="0" marB="0" anchor="ctr">
-                    <a:lnL w="0" cap="flat" cmpd="sng" algn="ctr">
-                      <a:noFill/>
-                    </a:lnL>
-                    <a:lnR w="0" cap="flat" cmpd="sng" algn="ctr">
-                      <a:noFill/>
-                    </a:lnR>
-                    <a:lnT w="0" cap="flat" cmpd="sng" algn="ctr">
-                      <a:noFill/>
-                    </a:lnT>
-                    <a:lnB w="0" cap="flat" cmpd="sng" algn="ctr">
-                      <a:noFill/>
-                    </a:lnB>
-                    <a:solidFill>
-                      <a:srgbClr val="FFFFFF"/>
-                    </a:solidFill>
-                  </a:tcPr>
-                </a:tc>
-                <a:tc>
-                  <a:txBody>
-                    <a:bodyPr/>
-                    <a:lstStyle/>
-                    <a:p>
-                      <a:pPr algn="ctr" indent="0" marL="0">
-                        <a:buNone/>
-                      </a:pPr>
-                      <a:r>
-                        <a:rPr lang="en-US" sz="1200" b="1" dirty="0">
-                          <a:solidFill>
-                            <a:srgbClr val="FF0000"/>
-                          </a:solidFill>
-                          <a:latin typeface="Arial" pitchFamily="34" charset="0"/>
-                          <a:ea typeface="Arial" pitchFamily="34" charset="-122"/>
-                          <a:cs typeface="Arial" pitchFamily="34" charset="-120"/>
-                        </a:rPr>
-                        <a:t>C1</a:t>
-                      </a:r>
-                      <a:endParaRPr lang="en-US" sz="1200" dirty="0">
-                        <a:latin typeface="Arial" charset="0"/>
-                        <a:ea typeface="Arial" charset="0"/>
-                        <a:cs typeface="Arial" charset="0"/>
-                      </a:endParaRPr>
-                    </a:p>
-                  </a:txBody>
-                  <a:tcPr marL="0" marR="0" marT="0" marB="0" anchor="ctr">
-                    <a:lnL w="0" cap="flat" cmpd="sng" algn="ctr">
-                      <a:noFill/>
-                    </a:lnL>
-                    <a:lnR w="0" cap="flat" cmpd="sng" algn="ctr">
-                      <a:noFill/>
-                    </a:lnR>
-                    <a:lnT w="0" cap="flat" cmpd="sng" algn="ctr">
-                      <a:noFill/>
-                    </a:lnT>
-                    <a:lnB w="0" cap="flat" cmpd="sng" algn="ctr">
-                      <a:noFill/>
-                    </a:lnB>
-                    <a:solidFill>
-                      <a:srgbClr val="FFFFFF"/>
-                    </a:solidFill>
-                  </a:tcPr>
-                </a:tc>
-                <a:tc>
-                  <a:txBody>
-                    <a:bodyPr/>
-                    <a:lstStyle/>
-                    <a:p>
-                      <a:pPr algn="ctr" indent="0" marL="0">
-                        <a:buNone/>
-                      </a:pPr>
-                      <a:r>
-                        <a:rPr lang="en-US" sz="1200" b="1" dirty="0">
-                          <a:solidFill>
-                            <a:srgbClr val="FF0000"/>
-                          </a:solidFill>
-                          <a:latin typeface="Arial" pitchFamily="34" charset="0"/>
-                          <a:ea typeface="Arial" pitchFamily="34" charset="-122"/>
-                          <a:cs typeface="Arial" pitchFamily="34" charset="-120"/>
-                        </a:rPr>
-                        <a:t>C1</a:t>
-                      </a:r>
-                      <a:endParaRPr lang="en-US" sz="1200" dirty="0">
-                        <a:latin typeface="Arial" charset="0"/>
-                        <a:ea typeface="Arial" charset="0"/>
-                        <a:cs typeface="Arial" charset="0"/>
-                      </a:endParaRPr>
-                    </a:p>
-                  </a:txBody>
-                  <a:tcPr marL="0" marR="0" marT="0" marB="0" anchor="ctr">
-                    <a:lnL w="0" cap="flat" cmpd="sng" algn="ctr">
-                      <a:noFill/>
-                    </a:lnL>
-                    <a:lnR w="0" cap="flat" cmpd="sng" algn="ctr">
-                      <a:noFill/>
-                    </a:lnR>
-                    <a:lnT w="0" cap="flat" cmpd="sng" algn="ctr">
-                      <a:noFill/>
-                    </a:lnT>
-                    <a:lnB w="0" cap="flat" cmpd="sng" algn="ctr">
-                      <a:noFill/>
-                    </a:lnB>
-                    <a:solidFill>
-                      <a:srgbClr val="FFFFFF"/>
-                    </a:solidFill>
-                  </a:tcPr>
-                </a:tc>
-                <a:tc>
-                  <a:txBody>
-                    <a:bodyPr/>
-                    <a:lstStyle/>
-                    <a:p>
-                      <a:pPr algn="ctr" indent="0" marL="0">
-                        <a:buNone/>
-                      </a:pPr>
-                      <a:r>
-                        <a:rPr lang="en-US" sz="1200" b="1" dirty="0">
-                          <a:solidFill>
-                            <a:srgbClr val="FF0000"/>
-                          </a:solidFill>
-                          <a:latin typeface="Arial" pitchFamily="34" charset="0"/>
-                          <a:ea typeface="Arial" pitchFamily="34" charset="-122"/>
-                          <a:cs typeface="Arial" pitchFamily="34" charset="-120"/>
-                        </a:rPr>
-                        <a:t>C2</a:t>
-                      </a:r>
-                      <a:endParaRPr lang="en-US" sz="1200" dirty="0">
-                        <a:latin typeface="Arial" charset="0"/>
-                        <a:ea typeface="Arial" charset="0"/>
-                        <a:cs typeface="Arial" charset="0"/>
-                      </a:endParaRPr>
-                    </a:p>
-                  </a:txBody>
-                  <a:tcPr marL="0" marR="0" marT="0" marB="0" anchor="ctr">
-                    <a:lnL w="0" cap="flat" cmpd="sng" algn="ctr">
-                      <a:noFill/>
-                    </a:lnL>
-                    <a:lnR w="0" cap="flat" cmpd="sng" algn="ctr">
-                      <a:noFill/>
-                    </a:lnR>
-                    <a:lnT w="0" cap="flat" cmpd="sng" algn="ctr">
-                      <a:noFill/>
-                    </a:lnT>
-                    <a:lnB w="0" cap="flat" cmpd="sng" algn="ctr">
-                      <a:noFill/>
-                    </a:lnB>
-                    <a:solidFill>
-                      <a:srgbClr val="FFFFFF"/>
-                    </a:solidFill>
-                  </a:tcPr>
-                </a:tc>
-                <a:tc>
-                  <a:txBody>
-                    <a:bodyPr/>
-                    <a:lstStyle/>
-                    <a:p>
-                      <a:pPr algn="ctr" indent="0" marL="0">
-                        <a:buNone/>
-                      </a:pPr>
-                      <a:r>
-                        <a:rPr lang="en-US" sz="1200" b="1" dirty="0">
-                          <a:solidFill>
-                            <a:srgbClr val="FF0000"/>
-                          </a:solidFill>
-                          <a:latin typeface="Arial" pitchFamily="34" charset="0"/>
-                          <a:ea typeface="Arial" pitchFamily="34" charset="-122"/>
-                          <a:cs typeface="Arial" pitchFamily="34" charset="-120"/>
-                        </a:rPr>
-                        <a:t>C2</a:t>
-                      </a:r>
-                      <a:endParaRPr lang="en-US" sz="1200" dirty="0">
-                        <a:latin typeface="Arial" charset="0"/>
-                        <a:ea typeface="Arial" charset="0"/>
-                        <a:cs typeface="Arial" charset="0"/>
-                      </a:endParaRPr>
-                    </a:p>
-                  </a:txBody>
-                  <a:tcPr marL="0" marR="0" marT="0" marB="0" anchor="ctr">
-                    <a:lnL w="0" cap="flat" cmpd="sng" algn="ctr">
-                      <a:noFill/>
-                    </a:lnL>
-                    <a:lnR w="0" cap="flat" cmpd="sng" algn="ctr">
-                      <a:noFill/>
-                    </a:lnR>
-                    <a:lnT w="0" cap="flat" cmpd="sng" algn="ctr">
-                      <a:noFill/>
-                    </a:lnT>
-                    <a:lnB w="0" cap="flat" cmpd="sng" algn="ctr">
-                      <a:noFill/>
-                    </a:lnB>
-                    <a:solidFill>
-                      <a:srgbClr val="FFFFFF"/>
-                    </a:solidFill>
-                  </a:tcPr>
-                </a:tc>
-                <a:tc>
-                  <a:txBody>
-                    <a:bodyPr/>
-                    <a:lstStyle/>
-                    <a:p>
-                      <a:pPr algn="ctr" indent="0" marL="0">
-                        <a:buNone/>
-                      </a:pPr>
-                      <a:r>
-                        <a:rPr lang="en-US" sz="1200" b="1" dirty="0">
-                          <a:solidFill>
-                            <a:srgbClr val="FF0000"/>
-                          </a:solidFill>
-                          <a:latin typeface="Arial" pitchFamily="34" charset="0"/>
-                          <a:ea typeface="Arial" pitchFamily="34" charset="-122"/>
-                          <a:cs typeface="Arial" pitchFamily="34" charset="-120"/>
-                        </a:rPr>
-                        <a:t>C2</a:t>
-                      </a:r>
-                      <a:endParaRPr lang="en-US" sz="1200" dirty="0">
-                        <a:latin typeface="Arial" charset="0"/>
-                        <a:ea typeface="Arial" charset="0"/>
-                        <a:cs typeface="Arial" charset="0"/>
-                      </a:endParaRPr>
-                    </a:p>
-                  </a:txBody>
-                  <a:tcPr marL="0" marR="0" marT="0" marB="0" anchor="ctr">
-                    <a:lnL w="0" cap="flat" cmpd="sng" algn="ctr">
-                      <a:noFill/>
-                    </a:lnL>
-                    <a:lnR w="0" cap="flat" cmpd="sng" algn="ctr">
-                      <a:noFill/>
-                    </a:lnR>
-                    <a:lnT w="0" cap="flat" cmpd="sng" algn="ctr">
-                      <a:noFill/>
-                    </a:lnT>
-                    <a:lnB w="0" cap="flat" cmpd="sng" algn="ctr">
-                      <a:noFill/>
-                    </a:lnB>
-                    <a:solidFill>
-                      <a:srgbClr val="FFFFFF"/>
-                    </a:solidFill>
-                  </a:tcPr>
-                </a:tc>
-              </a:tr>
-            </a:tbl>
-          </a:graphicData>
-        </a:graphic>
-      </p:graphicFrame>
+      <p:sp>
+        <p:nvSpPr>
+          <p:cNvPr id="9" name="Text 7"/>
+          <p:cNvSpPr/>
+          <p:nvPr/>
+        </p:nvSpPr>
+        <p:spPr>
+          <a:xfrm>
+            <a:off x="1079500" y="812800"/>
+            <a:ext cx="284480" cy="127000"/>
+          </a:xfrm>
+          <a:prstGeom prst="rect">
+            <a:avLst/>
+          </a:prstGeom>
+          <a:noFill/>
+          <a:ln/>
+        </p:spPr>
+        <p:txBody>
+          <a:bodyPr wrap="square" lIns="0" tIns="0" rIns="0" bIns="0" rtlCol="0" anchor="ctr"/>
+          <a:lstStyle/>
+          <a:p>
+            <a:pPr algn="ctr" indent="0" marL="0">
+              <a:buNone/>
+            </a:pPr>
+            <a:r>
+              <a:rPr lang="en-US" sz="1100" b="1" dirty="0">
+                <a:solidFill>
+                  <a:srgbClr val="000000"/>
+                </a:solidFill>
+                <a:latin typeface="Arial" pitchFamily="34" charset="0"/>
+                <a:ea typeface="Arial" pitchFamily="34" charset="-122"/>
+                <a:cs typeface="Arial" pitchFamily="34" charset="-120"/>
+              </a:rPr>
+              <a:t>x₁</a:t>
+            </a:r>
+            <a:endParaRPr lang="en-US" sz="1100" dirty="0"/>
+          </a:p>
+        </p:txBody>
+      </p:sp>
+      <p:sp>
+        <p:nvSpPr>
+          <p:cNvPr id="10" name="Text 8"/>
+          <p:cNvSpPr/>
+          <p:nvPr/>
+        </p:nvSpPr>
+        <p:spPr>
+          <a:xfrm>
+            <a:off x="1363980" y="812800"/>
+            <a:ext cx="284480" cy="127000"/>
+          </a:xfrm>
+          <a:prstGeom prst="rect">
+            <a:avLst/>
+          </a:prstGeom>
+          <a:noFill/>
+          <a:ln/>
+        </p:spPr>
+        <p:txBody>
+          <a:bodyPr wrap="square" lIns="0" tIns="0" rIns="0" bIns="0" rtlCol="0" anchor="ctr"/>
+          <a:lstStyle/>
+          <a:p>
+            <a:pPr algn="ctr" indent="0" marL="0">
+              <a:buNone/>
+            </a:pPr>
+            <a:r>
+              <a:rPr lang="en-US" sz="1100" b="1" dirty="0">
+                <a:solidFill>
+                  <a:srgbClr val="000000"/>
+                </a:solidFill>
+                <a:latin typeface="Arial" pitchFamily="34" charset="0"/>
+                <a:ea typeface="Arial" pitchFamily="34" charset="-122"/>
+                <a:cs typeface="Arial" pitchFamily="34" charset="-120"/>
+              </a:rPr>
+              <a:t>x₂</a:t>
+            </a:r>
+            <a:endParaRPr lang="en-US" sz="1100" dirty="0"/>
+          </a:p>
+        </p:txBody>
+      </p:sp>
+      <p:sp>
+        <p:nvSpPr>
+          <p:cNvPr id="11" name="Text 9"/>
+          <p:cNvSpPr/>
+          <p:nvPr/>
+        </p:nvSpPr>
+        <p:spPr>
+          <a:xfrm>
+            <a:off x="1648460" y="812800"/>
+            <a:ext cx="284480" cy="127000"/>
+          </a:xfrm>
+          <a:prstGeom prst="rect">
+            <a:avLst/>
+          </a:prstGeom>
+          <a:noFill/>
+          <a:ln/>
+        </p:spPr>
+        <p:txBody>
+          <a:bodyPr wrap="square" lIns="0" tIns="0" rIns="0" bIns="0" rtlCol="0" anchor="ctr"/>
+          <a:lstStyle/>
+          <a:p>
+            <a:pPr algn="ctr" indent="0" marL="0">
+              <a:buNone/>
+            </a:pPr>
+            <a:r>
+              <a:rPr lang="en-US" sz="1100" b="1" dirty="0">
+                <a:solidFill>
+                  <a:srgbClr val="000000"/>
+                </a:solidFill>
+                <a:latin typeface="Arial" pitchFamily="34" charset="0"/>
+                <a:ea typeface="Arial" pitchFamily="34" charset="-122"/>
+                <a:cs typeface="Arial" pitchFamily="34" charset="-120"/>
+              </a:rPr>
+              <a:t>x₃</a:t>
+            </a:r>
+            <a:endParaRPr lang="en-US" sz="1100" dirty="0"/>
+          </a:p>
+        </p:txBody>
+      </p:sp>
+      <p:sp>
+        <p:nvSpPr>
+          <p:cNvPr id="12" name="Text 10"/>
+          <p:cNvSpPr/>
+          <p:nvPr/>
+        </p:nvSpPr>
+        <p:spPr>
+          <a:xfrm>
+            <a:off x="1932940" y="812800"/>
+            <a:ext cx="284480" cy="127000"/>
+          </a:xfrm>
+          <a:prstGeom prst="rect">
+            <a:avLst/>
+          </a:prstGeom>
+          <a:noFill/>
+          <a:ln/>
+        </p:spPr>
+        <p:txBody>
+          <a:bodyPr wrap="square" lIns="0" tIns="0" rIns="0" bIns="0" rtlCol="0" anchor="ctr"/>
+          <a:lstStyle/>
+          <a:p>
+            <a:pPr algn="ctr" indent="0" marL="0">
+              <a:buNone/>
+            </a:pPr>
+            <a:r>
+              <a:rPr lang="en-US" sz="1100" b="1" dirty="0">
+                <a:solidFill>
+                  <a:srgbClr val="000000"/>
+                </a:solidFill>
+                <a:latin typeface="Arial" pitchFamily="34" charset="0"/>
+                <a:ea typeface="Arial" pitchFamily="34" charset="-122"/>
+                <a:cs typeface="Arial" pitchFamily="34" charset="-120"/>
+              </a:rPr>
+              <a:t>x₄</a:t>
+            </a:r>
+            <a:endParaRPr lang="en-US" sz="1100" dirty="0"/>
+          </a:p>
+        </p:txBody>
+      </p:sp>
+      <p:sp>
+        <p:nvSpPr>
+          <p:cNvPr id="13" name="Text 11"/>
+          <p:cNvSpPr/>
+          <p:nvPr/>
+        </p:nvSpPr>
+        <p:spPr>
+          <a:xfrm>
+            <a:off x="2217420" y="812800"/>
+            <a:ext cx="284480" cy="127000"/>
+          </a:xfrm>
+          <a:prstGeom prst="rect">
+            <a:avLst/>
+          </a:prstGeom>
+          <a:noFill/>
+          <a:ln/>
+        </p:spPr>
+        <p:txBody>
+          <a:bodyPr wrap="square" lIns="0" tIns="0" rIns="0" bIns="0" rtlCol="0" anchor="ctr"/>
+          <a:lstStyle/>
+          <a:p>
+            <a:pPr algn="ctr" indent="0" marL="0">
+              <a:buNone/>
+            </a:pPr>
+            <a:r>
+              <a:rPr lang="en-US" sz="1100" b="1" dirty="0">
+                <a:solidFill>
+                  <a:srgbClr val="000000"/>
+                </a:solidFill>
+                <a:latin typeface="Arial" pitchFamily="34" charset="0"/>
+                <a:ea typeface="Arial" pitchFamily="34" charset="-122"/>
+                <a:cs typeface="Arial" pitchFamily="34" charset="-120"/>
+              </a:rPr>
+              <a:t>x₅</a:t>
+            </a:r>
+            <a:endParaRPr lang="en-US" sz="1100" dirty="0"/>
+          </a:p>
+        </p:txBody>
+      </p:sp>
+      <p:sp>
+        <p:nvSpPr>
+          <p:cNvPr id="14" name="Text 12"/>
+          <p:cNvSpPr/>
+          <p:nvPr/>
+        </p:nvSpPr>
+        <p:spPr>
+          <a:xfrm>
+            <a:off x="2501900" y="812800"/>
+            <a:ext cx="284480" cy="127000"/>
+          </a:xfrm>
+          <a:prstGeom prst="rect">
+            <a:avLst/>
+          </a:prstGeom>
+          <a:noFill/>
+          <a:ln/>
+        </p:spPr>
+        <p:txBody>
+          <a:bodyPr wrap="square" lIns="0" tIns="0" rIns="0" bIns="0" rtlCol="0" anchor="ctr"/>
+          <a:lstStyle/>
+          <a:p>
+            <a:pPr algn="ctr" indent="0" marL="0">
+              <a:buNone/>
+            </a:pPr>
+            <a:r>
+              <a:rPr lang="en-US" sz="1100" b="1" dirty="0">
+                <a:solidFill>
+                  <a:srgbClr val="000000"/>
+                </a:solidFill>
+                <a:latin typeface="Arial" pitchFamily="34" charset="0"/>
+                <a:ea typeface="Arial" pitchFamily="34" charset="-122"/>
+                <a:cs typeface="Arial" pitchFamily="34" charset="-120"/>
+              </a:rPr>
+              <a:t>x₆</a:t>
+            </a:r>
+            <a:endParaRPr lang="en-US" sz="1100" dirty="0"/>
+          </a:p>
+        </p:txBody>
+      </p:sp>
+      <p:sp>
+        <p:nvSpPr>
+          <p:cNvPr id="15" name="Text 13"/>
+          <p:cNvSpPr/>
+          <p:nvPr/>
+        </p:nvSpPr>
+        <p:spPr>
+          <a:xfrm>
+            <a:off x="1079500" y="952500"/>
+            <a:ext cx="284480" cy="133350"/>
+          </a:xfrm>
+          <a:prstGeom prst="rect">
+            <a:avLst/>
+          </a:prstGeom>
+          <a:noFill/>
+          <a:ln/>
+        </p:spPr>
+        <p:txBody>
+          <a:bodyPr wrap="square" lIns="0" tIns="0" rIns="0" bIns="0" rtlCol="0" anchor="ctr"/>
+          <a:lstStyle/>
+          <a:p>
+            <a:pPr algn="ctr" indent="0" marL="0">
+              <a:buNone/>
+            </a:pPr>
+            <a:r>
+              <a:rPr lang="en-US" sz="1100" dirty="0">
+                <a:solidFill>
+                  <a:srgbClr val="000000"/>
+                </a:solidFill>
+                <a:latin typeface="Arial" pitchFamily="34" charset="0"/>
+                <a:ea typeface="Arial" pitchFamily="34" charset="-122"/>
+                <a:cs typeface="Arial" pitchFamily="34" charset="-120"/>
+              </a:rPr>
+              <a:t>1</a:t>
+            </a:r>
+            <a:endParaRPr lang="en-US" sz="1100" dirty="0"/>
+          </a:p>
+        </p:txBody>
+      </p:sp>
+      <p:sp>
+        <p:nvSpPr>
+          <p:cNvPr id="16" name="Text 14"/>
+          <p:cNvSpPr/>
+          <p:nvPr/>
+        </p:nvSpPr>
+        <p:spPr>
+          <a:xfrm>
+            <a:off x="1363980" y="952500"/>
+            <a:ext cx="284480" cy="133350"/>
+          </a:xfrm>
+          <a:prstGeom prst="rect">
+            <a:avLst/>
+          </a:prstGeom>
+          <a:noFill/>
+          <a:ln/>
+        </p:spPr>
+        <p:txBody>
+          <a:bodyPr wrap="square" lIns="0" tIns="0" rIns="0" bIns="0" rtlCol="0" anchor="ctr"/>
+          <a:lstStyle/>
+          <a:p>
+            <a:pPr algn="ctr" indent="0" marL="0">
+              <a:buNone/>
+            </a:pPr>
+            <a:r>
+              <a:rPr lang="en-US" sz="1100" dirty="0">
+                <a:solidFill>
+                  <a:srgbClr val="000000"/>
+                </a:solidFill>
+                <a:latin typeface="Arial" pitchFamily="34" charset="0"/>
+                <a:ea typeface="Arial" pitchFamily="34" charset="-122"/>
+                <a:cs typeface="Arial" pitchFamily="34" charset="-120"/>
+              </a:rPr>
+              <a:t>2</a:t>
+            </a:r>
+            <a:endParaRPr lang="en-US" sz="1100" dirty="0"/>
+          </a:p>
+        </p:txBody>
+      </p:sp>
+      <p:sp>
+        <p:nvSpPr>
+          <p:cNvPr id="17" name="Text 15"/>
+          <p:cNvSpPr/>
+          <p:nvPr/>
+        </p:nvSpPr>
+        <p:spPr>
+          <a:xfrm>
+            <a:off x="1648460" y="952500"/>
+            <a:ext cx="284480" cy="133350"/>
+          </a:xfrm>
+          <a:prstGeom prst="rect">
+            <a:avLst/>
+          </a:prstGeom>
+          <a:noFill/>
+          <a:ln/>
+        </p:spPr>
+        <p:txBody>
+          <a:bodyPr wrap="square" lIns="0" tIns="0" rIns="0" bIns="0" rtlCol="0" anchor="ctr"/>
+          <a:lstStyle/>
+          <a:p>
+            <a:pPr algn="ctr" indent="0" marL="0">
+              <a:buNone/>
+            </a:pPr>
+            <a:r>
+              <a:rPr lang="en-US" sz="1100" dirty="0">
+                <a:solidFill>
+                  <a:srgbClr val="000000"/>
+                </a:solidFill>
+                <a:latin typeface="Arial" pitchFamily="34" charset="0"/>
+                <a:ea typeface="Arial" pitchFamily="34" charset="-122"/>
+                <a:cs typeface="Arial" pitchFamily="34" charset="-120"/>
+              </a:rPr>
+              <a:t>1</a:t>
+            </a:r>
+            <a:endParaRPr lang="en-US" sz="1100" dirty="0"/>
+          </a:p>
+        </p:txBody>
+      </p:sp>
+      <p:sp>
+        <p:nvSpPr>
+          <p:cNvPr id="18" name="Text 16"/>
+          <p:cNvSpPr/>
+          <p:nvPr/>
+        </p:nvSpPr>
+        <p:spPr>
+          <a:xfrm>
+            <a:off x="1932940" y="952500"/>
+            <a:ext cx="284480" cy="133350"/>
+          </a:xfrm>
+          <a:prstGeom prst="rect">
+            <a:avLst/>
+          </a:prstGeom>
+          <a:noFill/>
+          <a:ln/>
+        </p:spPr>
+        <p:txBody>
+          <a:bodyPr wrap="square" lIns="0" tIns="0" rIns="0" bIns="0" rtlCol="0" anchor="ctr"/>
+          <a:lstStyle/>
+          <a:p>
+            <a:pPr algn="ctr" indent="0" marL="0">
+              <a:buNone/>
+            </a:pPr>
+            <a:r>
+              <a:rPr lang="en-US" sz="1100" dirty="0">
+                <a:solidFill>
+                  <a:srgbClr val="000000"/>
+                </a:solidFill>
+                <a:latin typeface="Arial" pitchFamily="34" charset="0"/>
+                <a:ea typeface="Arial" pitchFamily="34" charset="-122"/>
+                <a:cs typeface="Arial" pitchFamily="34" charset="-120"/>
+              </a:rPr>
+              <a:t>5</a:t>
+            </a:r>
+            <a:endParaRPr lang="en-US" sz="1100" dirty="0"/>
+          </a:p>
+        </p:txBody>
+      </p:sp>
+      <p:sp>
+        <p:nvSpPr>
+          <p:cNvPr id="19" name="Text 17"/>
+          <p:cNvSpPr/>
+          <p:nvPr/>
+        </p:nvSpPr>
+        <p:spPr>
+          <a:xfrm>
+            <a:off x="2217420" y="952500"/>
+            <a:ext cx="284480" cy="133350"/>
+          </a:xfrm>
+          <a:prstGeom prst="rect">
+            <a:avLst/>
+          </a:prstGeom>
+          <a:noFill/>
+          <a:ln/>
+        </p:spPr>
+        <p:txBody>
+          <a:bodyPr wrap="square" lIns="0" tIns="0" rIns="0" bIns="0" rtlCol="0" anchor="ctr"/>
+          <a:lstStyle/>
+          <a:p>
+            <a:pPr algn="ctr" indent="0" marL="0">
+              <a:buNone/>
+            </a:pPr>
+            <a:r>
+              <a:rPr lang="en-US" sz="1100" dirty="0">
+                <a:solidFill>
+                  <a:srgbClr val="000000"/>
+                </a:solidFill>
+                <a:latin typeface="Arial" pitchFamily="34" charset="0"/>
+                <a:ea typeface="Arial" pitchFamily="34" charset="-122"/>
+                <a:cs typeface="Arial" pitchFamily="34" charset="-120"/>
+              </a:rPr>
+              <a:t>6</a:t>
+            </a:r>
+            <a:endParaRPr lang="en-US" sz="1100" dirty="0"/>
+          </a:p>
+        </p:txBody>
+      </p:sp>
+      <p:sp>
+        <p:nvSpPr>
+          <p:cNvPr id="20" name="Text 18"/>
+          <p:cNvSpPr/>
+          <p:nvPr/>
+        </p:nvSpPr>
+        <p:spPr>
+          <a:xfrm>
+            <a:off x="2501900" y="952500"/>
+            <a:ext cx="284480" cy="133350"/>
+          </a:xfrm>
+          <a:prstGeom prst="rect">
+            <a:avLst/>
+          </a:prstGeom>
+          <a:noFill/>
+          <a:ln/>
+        </p:spPr>
+        <p:txBody>
+          <a:bodyPr wrap="square" lIns="0" tIns="0" rIns="0" bIns="0" rtlCol="0" anchor="ctr"/>
+          <a:lstStyle/>
+          <a:p>
+            <a:pPr algn="ctr" indent="0" marL="0">
+              <a:buNone/>
+            </a:pPr>
+            <a:r>
+              <a:rPr lang="en-US" sz="1100" dirty="0">
+                <a:solidFill>
+                  <a:srgbClr val="000000"/>
+                </a:solidFill>
+                <a:latin typeface="Arial" pitchFamily="34" charset="0"/>
+                <a:ea typeface="Arial" pitchFamily="34" charset="-122"/>
+                <a:cs typeface="Arial" pitchFamily="34" charset="-120"/>
+              </a:rPr>
+              <a:t>6</a:t>
+            </a:r>
+            <a:endParaRPr lang="en-US" sz="1100" dirty="0"/>
+          </a:p>
+        </p:txBody>
+      </p:sp>
+      <p:sp>
+        <p:nvSpPr>
+          <p:cNvPr id="21" name="Text 19"/>
+          <p:cNvSpPr/>
+          <p:nvPr/>
+        </p:nvSpPr>
+        <p:spPr>
+          <a:xfrm>
+            <a:off x="1079500" y="1085850"/>
+            <a:ext cx="284480" cy="127000"/>
+          </a:xfrm>
+          <a:prstGeom prst="rect">
+            <a:avLst/>
+          </a:prstGeom>
+          <a:noFill/>
+          <a:ln/>
+        </p:spPr>
+        <p:txBody>
+          <a:bodyPr wrap="square" lIns="0" tIns="0" rIns="0" bIns="0" rtlCol="0" anchor="ctr"/>
+          <a:lstStyle/>
+          <a:p>
+            <a:pPr algn="ctr" indent="0" marL="0">
+              <a:buNone/>
+            </a:pPr>
+            <a:r>
+              <a:rPr lang="en-US" sz="1100" dirty="0">
+                <a:solidFill>
+                  <a:srgbClr val="000000"/>
+                </a:solidFill>
+                <a:latin typeface="Arial" pitchFamily="34" charset="0"/>
+                <a:ea typeface="Arial" pitchFamily="34" charset="-122"/>
+                <a:cs typeface="Arial" pitchFamily="34" charset="-120"/>
+              </a:rPr>
+              <a:t>1</a:t>
+            </a:r>
+            <a:endParaRPr lang="en-US" sz="1100" dirty="0"/>
+          </a:p>
+        </p:txBody>
+      </p:sp>
+      <p:sp>
+        <p:nvSpPr>
+          <p:cNvPr id="22" name="Text 20"/>
+          <p:cNvSpPr/>
+          <p:nvPr/>
+        </p:nvSpPr>
+        <p:spPr>
+          <a:xfrm>
+            <a:off x="1363980" y="1085850"/>
+            <a:ext cx="284480" cy="127000"/>
+          </a:xfrm>
+          <a:prstGeom prst="rect">
+            <a:avLst/>
+          </a:prstGeom>
+          <a:noFill/>
+          <a:ln/>
+        </p:spPr>
+        <p:txBody>
+          <a:bodyPr wrap="square" lIns="0" tIns="0" rIns="0" bIns="0" rtlCol="0" anchor="ctr"/>
+          <a:lstStyle/>
+          <a:p>
+            <a:pPr algn="ctr" indent="0" marL="0">
+              <a:buNone/>
+            </a:pPr>
+            <a:r>
+              <a:rPr lang="en-US" sz="1100" dirty="0">
+                <a:solidFill>
+                  <a:srgbClr val="000000"/>
+                </a:solidFill>
+                <a:latin typeface="Arial" pitchFamily="34" charset="0"/>
+                <a:ea typeface="Arial" pitchFamily="34" charset="-122"/>
+                <a:cs typeface="Arial" pitchFamily="34" charset="-120"/>
+              </a:rPr>
+              <a:t>1</a:t>
+            </a:r>
+            <a:endParaRPr lang="en-US" sz="1100" dirty="0"/>
+          </a:p>
+        </p:txBody>
+      </p:sp>
+      <p:sp>
+        <p:nvSpPr>
+          <p:cNvPr id="23" name="Text 21"/>
+          <p:cNvSpPr/>
+          <p:nvPr/>
+        </p:nvSpPr>
+        <p:spPr>
+          <a:xfrm>
+            <a:off x="1648460" y="1085850"/>
+            <a:ext cx="284480" cy="127000"/>
+          </a:xfrm>
+          <a:prstGeom prst="rect">
+            <a:avLst/>
+          </a:prstGeom>
+          <a:noFill/>
+          <a:ln/>
+        </p:spPr>
+        <p:txBody>
+          <a:bodyPr wrap="square" lIns="0" tIns="0" rIns="0" bIns="0" rtlCol="0" anchor="ctr"/>
+          <a:lstStyle/>
+          <a:p>
+            <a:pPr algn="ctr" indent="0" marL="0">
+              <a:buNone/>
+            </a:pPr>
+            <a:r>
+              <a:rPr lang="en-US" sz="1100" dirty="0">
+                <a:solidFill>
+                  <a:srgbClr val="000000"/>
+                </a:solidFill>
+                <a:latin typeface="Arial" pitchFamily="34" charset="0"/>
+                <a:ea typeface="Arial" pitchFamily="34" charset="-122"/>
+                <a:cs typeface="Arial" pitchFamily="34" charset="-120"/>
+              </a:rPr>
+              <a:t>2</a:t>
+            </a:r>
+            <a:endParaRPr lang="en-US" sz="1100" dirty="0"/>
+          </a:p>
+        </p:txBody>
+      </p:sp>
+      <p:sp>
+        <p:nvSpPr>
+          <p:cNvPr id="24" name="Text 22"/>
+          <p:cNvSpPr/>
+          <p:nvPr/>
+        </p:nvSpPr>
+        <p:spPr>
+          <a:xfrm>
+            <a:off x="1932940" y="1085850"/>
+            <a:ext cx="284480" cy="127000"/>
+          </a:xfrm>
+          <a:prstGeom prst="rect">
+            <a:avLst/>
+          </a:prstGeom>
+          <a:noFill/>
+          <a:ln/>
+        </p:spPr>
+        <p:txBody>
+          <a:bodyPr wrap="square" lIns="0" tIns="0" rIns="0" bIns="0" rtlCol="0" anchor="ctr"/>
+          <a:lstStyle/>
+          <a:p>
+            <a:pPr algn="ctr" indent="0" marL="0">
+              <a:buNone/>
+            </a:pPr>
+            <a:r>
+              <a:rPr lang="en-US" sz="1100" dirty="0">
+                <a:solidFill>
+                  <a:srgbClr val="000000"/>
+                </a:solidFill>
+                <a:latin typeface="Arial" pitchFamily="34" charset="0"/>
+                <a:ea typeface="Arial" pitchFamily="34" charset="-122"/>
+                <a:cs typeface="Arial" pitchFamily="34" charset="-120"/>
+              </a:rPr>
+              <a:t>4</a:t>
+            </a:r>
+            <a:endParaRPr lang="en-US" sz="1100" dirty="0"/>
+          </a:p>
+        </p:txBody>
+      </p:sp>
+      <p:sp>
+        <p:nvSpPr>
+          <p:cNvPr id="25" name="Text 23"/>
+          <p:cNvSpPr/>
+          <p:nvPr/>
+        </p:nvSpPr>
+        <p:spPr>
+          <a:xfrm>
+            <a:off x="2217420" y="1085850"/>
+            <a:ext cx="284480" cy="127000"/>
+          </a:xfrm>
+          <a:prstGeom prst="rect">
+            <a:avLst/>
+          </a:prstGeom>
+          <a:noFill/>
+          <a:ln/>
+        </p:spPr>
+        <p:txBody>
+          <a:bodyPr wrap="square" lIns="0" tIns="0" rIns="0" bIns="0" rtlCol="0" anchor="ctr"/>
+          <a:lstStyle/>
+          <a:p>
+            <a:pPr algn="ctr" indent="0" marL="0">
+              <a:buNone/>
+            </a:pPr>
+            <a:r>
+              <a:rPr lang="en-US" sz="1100" dirty="0">
+                <a:solidFill>
+                  <a:srgbClr val="000000"/>
+                </a:solidFill>
+                <a:latin typeface="Arial" pitchFamily="34" charset="0"/>
+                <a:ea typeface="Arial" pitchFamily="34" charset="-122"/>
+                <a:cs typeface="Arial" pitchFamily="34" charset="-120"/>
+              </a:rPr>
+              <a:t>5</a:t>
+            </a:r>
+            <a:endParaRPr lang="en-US" sz="1100" dirty="0"/>
+          </a:p>
+        </p:txBody>
+      </p:sp>
+      <p:sp>
+        <p:nvSpPr>
+          <p:cNvPr id="26" name="Text 24"/>
+          <p:cNvSpPr/>
+          <p:nvPr/>
+        </p:nvSpPr>
+        <p:spPr>
+          <a:xfrm>
+            <a:off x="2501900" y="1085850"/>
+            <a:ext cx="284480" cy="127000"/>
+          </a:xfrm>
+          <a:prstGeom prst="rect">
+            <a:avLst/>
+          </a:prstGeom>
+          <a:noFill/>
+          <a:ln/>
+        </p:spPr>
+        <p:txBody>
+          <a:bodyPr wrap="square" lIns="0" tIns="0" rIns="0" bIns="0" rtlCol="0" anchor="ctr"/>
+          <a:lstStyle/>
+          <a:p>
+            <a:pPr algn="ctr" indent="0" marL="0">
+              <a:buNone/>
+            </a:pPr>
+            <a:r>
+              <a:rPr lang="en-US" sz="1100" dirty="0">
+                <a:solidFill>
+                  <a:srgbClr val="000000"/>
+                </a:solidFill>
+                <a:latin typeface="Arial" pitchFamily="34" charset="0"/>
+                <a:ea typeface="Arial" pitchFamily="34" charset="-122"/>
+                <a:cs typeface="Arial" pitchFamily="34" charset="-120"/>
+              </a:rPr>
+              <a:t>6</a:t>
+            </a:r>
+            <a:endParaRPr lang="en-US" sz="1100" dirty="0"/>
+          </a:p>
+        </p:txBody>
+      </p:sp>
+      <p:sp>
+        <p:nvSpPr>
+          <p:cNvPr id="27" name="Text 25"/>
+          <p:cNvSpPr/>
+          <p:nvPr/>
+        </p:nvSpPr>
+        <p:spPr>
+          <a:xfrm>
+            <a:off x="1079500" y="1219200"/>
+            <a:ext cx="284480" cy="127000"/>
+          </a:xfrm>
+          <a:prstGeom prst="rect">
+            <a:avLst/>
+          </a:prstGeom>
+          <a:noFill/>
+          <a:ln/>
+        </p:spPr>
+        <p:txBody>
+          <a:bodyPr wrap="square" lIns="0" tIns="0" rIns="0" bIns="0" rtlCol="0" anchor="ctr"/>
+          <a:lstStyle/>
+          <a:p>
+            <a:pPr algn="ctr" indent="0" marL="0">
+              <a:buNone/>
+            </a:pPr>
+            <a:r>
+              <a:rPr lang="en-US" sz="1100" dirty="0">
+                <a:solidFill>
+                  <a:srgbClr val="000000"/>
+                </a:solidFill>
+                <a:latin typeface="Arial" pitchFamily="34" charset="0"/>
+                <a:ea typeface="Arial" pitchFamily="34" charset="-122"/>
+                <a:cs typeface="Arial" pitchFamily="34" charset="-120"/>
+              </a:rPr>
+              <a:t>1</a:t>
+            </a:r>
+            <a:endParaRPr lang="en-US" sz="1100" dirty="0"/>
+          </a:p>
+        </p:txBody>
+      </p:sp>
+      <p:sp>
+        <p:nvSpPr>
+          <p:cNvPr id="28" name="Text 26"/>
+          <p:cNvSpPr/>
+          <p:nvPr/>
+        </p:nvSpPr>
+        <p:spPr>
+          <a:xfrm>
+            <a:off x="1363980" y="1219200"/>
+            <a:ext cx="284480" cy="127000"/>
+          </a:xfrm>
+          <a:prstGeom prst="rect">
+            <a:avLst/>
+          </a:prstGeom>
+          <a:noFill/>
+          <a:ln/>
+        </p:spPr>
+        <p:txBody>
+          <a:bodyPr wrap="square" lIns="0" tIns="0" rIns="0" bIns="0" rtlCol="0" anchor="ctr"/>
+          <a:lstStyle/>
+          <a:p>
+            <a:pPr algn="ctr" indent="0" marL="0">
+              <a:buNone/>
+            </a:pPr>
+            <a:r>
+              <a:rPr lang="en-US" sz="1100" dirty="0">
+                <a:solidFill>
+                  <a:srgbClr val="000000"/>
+                </a:solidFill>
+                <a:latin typeface="Arial" pitchFamily="34" charset="0"/>
+                <a:ea typeface="Arial" pitchFamily="34" charset="-122"/>
+                <a:cs typeface="Arial" pitchFamily="34" charset="-120"/>
+              </a:rPr>
+              <a:t>2</a:t>
+            </a:r>
+            <a:endParaRPr lang="en-US" sz="1100" dirty="0"/>
+          </a:p>
+        </p:txBody>
+      </p:sp>
+      <p:sp>
+        <p:nvSpPr>
+          <p:cNvPr id="29" name="Text 27"/>
+          <p:cNvSpPr/>
+          <p:nvPr/>
+        </p:nvSpPr>
+        <p:spPr>
+          <a:xfrm>
+            <a:off x="1648460" y="1219200"/>
+            <a:ext cx="284480" cy="127000"/>
+          </a:xfrm>
+          <a:prstGeom prst="rect">
+            <a:avLst/>
+          </a:prstGeom>
+          <a:noFill/>
+          <a:ln/>
+        </p:spPr>
+        <p:txBody>
+          <a:bodyPr wrap="square" lIns="0" tIns="0" rIns="0" bIns="0" rtlCol="0" anchor="ctr"/>
+          <a:lstStyle/>
+          <a:p>
+            <a:pPr algn="ctr" indent="0" marL="0">
+              <a:buNone/>
+            </a:pPr>
+            <a:r>
+              <a:rPr lang="en-US" sz="1100" dirty="0">
+                <a:solidFill>
+                  <a:srgbClr val="000000"/>
+                </a:solidFill>
+                <a:latin typeface="Arial" pitchFamily="34" charset="0"/>
+                <a:ea typeface="Arial" pitchFamily="34" charset="-122"/>
+                <a:cs typeface="Arial" pitchFamily="34" charset="-120"/>
+              </a:rPr>
+              <a:t>2</a:t>
+            </a:r>
+            <a:endParaRPr lang="en-US" sz="1100" dirty="0"/>
+          </a:p>
+        </p:txBody>
+      </p:sp>
+      <p:sp>
+        <p:nvSpPr>
+          <p:cNvPr id="30" name="Text 28"/>
+          <p:cNvSpPr/>
+          <p:nvPr/>
+        </p:nvSpPr>
+        <p:spPr>
+          <a:xfrm>
+            <a:off x="1932940" y="1219200"/>
+            <a:ext cx="284480" cy="127000"/>
+          </a:xfrm>
+          <a:prstGeom prst="rect">
+            <a:avLst/>
+          </a:prstGeom>
+          <a:noFill/>
+          <a:ln/>
+        </p:spPr>
+        <p:txBody>
+          <a:bodyPr wrap="square" lIns="0" tIns="0" rIns="0" bIns="0" rtlCol="0" anchor="ctr"/>
+          <a:lstStyle/>
+          <a:p>
+            <a:pPr algn="ctr" indent="0" marL="0">
+              <a:buNone/>
+            </a:pPr>
+            <a:r>
+              <a:rPr lang="en-US" sz="1100" dirty="0">
+                <a:solidFill>
+                  <a:srgbClr val="000000"/>
+                </a:solidFill>
+                <a:latin typeface="Arial" pitchFamily="34" charset="0"/>
+                <a:ea typeface="Arial" pitchFamily="34" charset="-122"/>
+                <a:cs typeface="Arial" pitchFamily="34" charset="-120"/>
+              </a:rPr>
+              <a:t>4</a:t>
+            </a:r>
+            <a:endParaRPr lang="en-US" sz="1100" dirty="0"/>
+          </a:p>
+        </p:txBody>
+      </p:sp>
+      <p:sp>
+        <p:nvSpPr>
+          <p:cNvPr id="31" name="Text 29"/>
+          <p:cNvSpPr/>
+          <p:nvPr/>
+        </p:nvSpPr>
+        <p:spPr>
+          <a:xfrm>
+            <a:off x="2217420" y="1219200"/>
+            <a:ext cx="284480" cy="127000"/>
+          </a:xfrm>
+          <a:prstGeom prst="rect">
+            <a:avLst/>
+          </a:prstGeom>
+          <a:noFill/>
+          <a:ln/>
+        </p:spPr>
+        <p:txBody>
+          <a:bodyPr wrap="square" lIns="0" tIns="0" rIns="0" bIns="0" rtlCol="0" anchor="ctr"/>
+          <a:lstStyle/>
+          <a:p>
+            <a:pPr algn="ctr" indent="0" marL="0">
+              <a:buNone/>
+            </a:pPr>
+            <a:r>
+              <a:rPr lang="en-US" sz="1100" dirty="0">
+                <a:solidFill>
+                  <a:srgbClr val="000000"/>
+                </a:solidFill>
+                <a:latin typeface="Arial" pitchFamily="34" charset="0"/>
+                <a:ea typeface="Arial" pitchFamily="34" charset="-122"/>
+                <a:cs typeface="Arial" pitchFamily="34" charset="-120"/>
+              </a:rPr>
+              <a:t>5</a:t>
+            </a:r>
+            <a:endParaRPr lang="en-US" sz="1100" dirty="0"/>
+          </a:p>
+        </p:txBody>
+      </p:sp>
+      <p:sp>
+        <p:nvSpPr>
+          <p:cNvPr id="32" name="Text 30"/>
+          <p:cNvSpPr/>
+          <p:nvPr/>
+        </p:nvSpPr>
+        <p:spPr>
+          <a:xfrm>
+            <a:off x="2501900" y="1219200"/>
+            <a:ext cx="284480" cy="127000"/>
+          </a:xfrm>
+          <a:prstGeom prst="rect">
+            <a:avLst/>
+          </a:prstGeom>
+          <a:noFill/>
+          <a:ln/>
+        </p:spPr>
+        <p:txBody>
+          <a:bodyPr wrap="square" lIns="0" tIns="0" rIns="0" bIns="0" rtlCol="0" anchor="ctr"/>
+          <a:lstStyle/>
+          <a:p>
+            <a:pPr algn="ctr" indent="0" marL="0">
+              <a:buNone/>
+            </a:pPr>
+            <a:r>
+              <a:rPr lang="en-US" sz="1100" dirty="0">
+                <a:solidFill>
+                  <a:srgbClr val="000000"/>
+                </a:solidFill>
+                <a:latin typeface="Arial" pitchFamily="34" charset="0"/>
+                <a:ea typeface="Arial" pitchFamily="34" charset="-122"/>
+                <a:cs typeface="Arial" pitchFamily="34" charset="-120"/>
+              </a:rPr>
+              <a:t>6</a:t>
+            </a:r>
+            <a:endParaRPr lang="en-US" sz="1100" dirty="0"/>
+          </a:p>
+        </p:txBody>
+      </p:sp>
+      <p:sp>
+        <p:nvSpPr>
+          <p:cNvPr id="33" name="Text 31"/>
+          <p:cNvSpPr/>
+          <p:nvPr/>
+        </p:nvSpPr>
+        <p:spPr>
+          <a:xfrm>
+            <a:off x="1079500" y="1409700"/>
+            <a:ext cx="284480" cy="171450"/>
+          </a:xfrm>
+          <a:prstGeom prst="rect">
+            <a:avLst/>
+          </a:prstGeom>
+          <a:noFill/>
+          <a:ln/>
+        </p:spPr>
+        <p:txBody>
+          <a:bodyPr wrap="square" lIns="0" tIns="0" rIns="0" bIns="0" rtlCol="0" anchor="ctr"/>
+          <a:lstStyle/>
+          <a:p>
+            <a:pPr algn="ctr" indent="0" marL="0">
+              <a:buNone/>
+            </a:pPr>
+            <a:r>
+              <a:rPr lang="en-US" sz="1100" b="1" dirty="0">
+                <a:solidFill>
+                  <a:srgbClr val="FF0000"/>
+                </a:solidFill>
+                <a:latin typeface="Arial" pitchFamily="34" charset="0"/>
+                <a:ea typeface="Arial" pitchFamily="34" charset="-122"/>
+                <a:cs typeface="Arial" pitchFamily="34" charset="-120"/>
+              </a:rPr>
+              <a:t>C1</a:t>
+            </a:r>
+            <a:endParaRPr lang="en-US" sz="1100" dirty="0"/>
+          </a:p>
+        </p:txBody>
+      </p:sp>
+      <p:sp>
+        <p:nvSpPr>
+          <p:cNvPr id="34" name="Text 32"/>
+          <p:cNvSpPr/>
+          <p:nvPr/>
+        </p:nvSpPr>
+        <p:spPr>
+          <a:xfrm>
+            <a:off x="1363980" y="1409700"/>
+            <a:ext cx="284480" cy="171450"/>
+          </a:xfrm>
+          <a:prstGeom prst="rect">
+            <a:avLst/>
+          </a:prstGeom>
+          <a:noFill/>
+          <a:ln/>
+        </p:spPr>
+        <p:txBody>
+          <a:bodyPr wrap="square" lIns="0" tIns="0" rIns="0" bIns="0" rtlCol="0" anchor="ctr"/>
+          <a:lstStyle/>
+          <a:p>
+            <a:pPr algn="ctr" indent="0" marL="0">
+              <a:buNone/>
+            </a:pPr>
+            <a:r>
+              <a:rPr lang="en-US" sz="1100" b="1" dirty="0">
+                <a:solidFill>
+                  <a:srgbClr val="FF0000"/>
+                </a:solidFill>
+                <a:latin typeface="Arial" pitchFamily="34" charset="0"/>
+                <a:ea typeface="Arial" pitchFamily="34" charset="-122"/>
+                <a:cs typeface="Arial" pitchFamily="34" charset="-120"/>
+              </a:rPr>
+              <a:t>C1</a:t>
+            </a:r>
+            <a:endParaRPr lang="en-US" sz="1100" dirty="0"/>
+          </a:p>
+        </p:txBody>
+      </p:sp>
+      <p:sp>
+        <p:nvSpPr>
+          <p:cNvPr id="35" name="Text 33"/>
+          <p:cNvSpPr/>
+          <p:nvPr/>
+        </p:nvSpPr>
+        <p:spPr>
+          <a:xfrm>
+            <a:off x="1648460" y="1409700"/>
+            <a:ext cx="284480" cy="171450"/>
+          </a:xfrm>
+          <a:prstGeom prst="rect">
+            <a:avLst/>
+          </a:prstGeom>
+          <a:noFill/>
+          <a:ln/>
+        </p:spPr>
+        <p:txBody>
+          <a:bodyPr wrap="square" lIns="0" tIns="0" rIns="0" bIns="0" rtlCol="0" anchor="ctr"/>
+          <a:lstStyle/>
+          <a:p>
+            <a:pPr algn="ctr" indent="0" marL="0">
+              <a:buNone/>
+            </a:pPr>
+            <a:r>
+              <a:rPr lang="en-US" sz="1100" b="1" dirty="0">
+                <a:solidFill>
+                  <a:srgbClr val="FF0000"/>
+                </a:solidFill>
+                <a:latin typeface="Arial" pitchFamily="34" charset="0"/>
+                <a:ea typeface="Arial" pitchFamily="34" charset="-122"/>
+                <a:cs typeface="Arial" pitchFamily="34" charset="-120"/>
+              </a:rPr>
+              <a:t>C1</a:t>
+            </a:r>
+            <a:endParaRPr lang="en-US" sz="1100" dirty="0"/>
+          </a:p>
+        </p:txBody>
+      </p:sp>
+      <p:sp>
+        <p:nvSpPr>
+          <p:cNvPr id="36" name="Text 34"/>
+          <p:cNvSpPr/>
+          <p:nvPr/>
+        </p:nvSpPr>
+        <p:spPr>
+          <a:xfrm>
+            <a:off x="1932940" y="1409700"/>
+            <a:ext cx="284480" cy="171450"/>
+          </a:xfrm>
+          <a:prstGeom prst="rect">
+            <a:avLst/>
+          </a:prstGeom>
+          <a:noFill/>
+          <a:ln/>
+        </p:spPr>
+        <p:txBody>
+          <a:bodyPr wrap="square" lIns="0" tIns="0" rIns="0" bIns="0" rtlCol="0" anchor="ctr"/>
+          <a:lstStyle/>
+          <a:p>
+            <a:pPr algn="ctr" indent="0" marL="0">
+              <a:buNone/>
+            </a:pPr>
+            <a:r>
+              <a:rPr lang="en-US" sz="1100" b="1" dirty="0">
+                <a:solidFill>
+                  <a:srgbClr val="1F1655"/>
+                </a:solidFill>
+                <a:latin typeface="Arial" pitchFamily="34" charset="0"/>
+                <a:ea typeface="Arial" pitchFamily="34" charset="-122"/>
+                <a:cs typeface="Arial" pitchFamily="34" charset="-120"/>
+              </a:rPr>
+              <a:t>C2</a:t>
+            </a:r>
+            <a:endParaRPr lang="en-US" sz="1100" dirty="0"/>
+          </a:p>
+        </p:txBody>
+      </p:sp>
+      <p:sp>
+        <p:nvSpPr>
+          <p:cNvPr id="37" name="Text 35"/>
+          <p:cNvSpPr/>
+          <p:nvPr/>
+        </p:nvSpPr>
+        <p:spPr>
+          <a:xfrm>
+            <a:off x="2217420" y="1409700"/>
+            <a:ext cx="284480" cy="171450"/>
+          </a:xfrm>
+          <a:prstGeom prst="rect">
+            <a:avLst/>
+          </a:prstGeom>
+          <a:noFill/>
+          <a:ln/>
+        </p:spPr>
+        <p:txBody>
+          <a:bodyPr wrap="square" lIns="0" tIns="0" rIns="0" bIns="0" rtlCol="0" anchor="ctr"/>
+          <a:lstStyle/>
+          <a:p>
+            <a:pPr algn="ctr" indent="0" marL="0">
+              <a:buNone/>
+            </a:pPr>
+            <a:r>
+              <a:rPr lang="en-US" sz="1100" b="1" dirty="0">
+                <a:solidFill>
+                  <a:srgbClr val="1F1655"/>
+                </a:solidFill>
+                <a:latin typeface="Arial" pitchFamily="34" charset="0"/>
+                <a:ea typeface="Arial" pitchFamily="34" charset="-122"/>
+                <a:cs typeface="Arial" pitchFamily="34" charset="-120"/>
+              </a:rPr>
+              <a:t>C2</a:t>
+            </a:r>
+            <a:endParaRPr lang="en-US" sz="1100" dirty="0"/>
+          </a:p>
+        </p:txBody>
+      </p:sp>
+      <p:sp>
+        <p:nvSpPr>
+          <p:cNvPr id="38" name="Text 36"/>
+          <p:cNvSpPr/>
+          <p:nvPr/>
+        </p:nvSpPr>
+        <p:spPr>
+          <a:xfrm>
+            <a:off x="2501900" y="1409700"/>
+            <a:ext cx="284480" cy="171450"/>
+          </a:xfrm>
+          <a:prstGeom prst="rect">
+            <a:avLst/>
+          </a:prstGeom>
+          <a:noFill/>
+          <a:ln/>
+        </p:spPr>
+        <p:txBody>
+          <a:bodyPr wrap="square" lIns="0" tIns="0" rIns="0" bIns="0" rtlCol="0" anchor="ctr"/>
+          <a:lstStyle/>
+          <a:p>
+            <a:pPr algn="ctr" indent="0" marL="0">
+              <a:buNone/>
+            </a:pPr>
+            <a:r>
+              <a:rPr lang="en-US" sz="1100" b="1" dirty="0">
+                <a:solidFill>
+                  <a:srgbClr val="1F1655"/>
+                </a:solidFill>
+                <a:latin typeface="Arial" pitchFamily="34" charset="0"/>
+                <a:ea typeface="Arial" pitchFamily="34" charset="-122"/>
+                <a:cs typeface="Arial" pitchFamily="34" charset="-120"/>
+              </a:rPr>
+              <a:t>C2</a:t>
+            </a:r>
+            <a:endParaRPr lang="en-US" sz="1100" dirty="0"/>
+          </a:p>
+        </p:txBody>
+      </p:sp>
+      <p:sp>
+        <p:nvSpPr>
+          <p:cNvPr id="39" name="Text 37"/>
+          <p:cNvSpPr/>
+          <p:nvPr/>
+        </p:nvSpPr>
+        <p:spPr>
+          <a:xfrm>
+            <a:off x="1117600" y="1003300"/>
+            <a:ext cx="76200" cy="317500"/>
+          </a:xfrm>
+          <a:prstGeom prst="rect">
+            <a:avLst/>
+          </a:prstGeom>
+          <a:noFill/>
+          <a:ln/>
+        </p:spPr>
+        <p:txBody>
+          <a:bodyPr wrap="square" lIns="0" tIns="0" rIns="0" bIns="0" rtlCol="0" anchor="ctr"/>
+          <a:lstStyle/>
+          <a:p>
+            <a:pPr algn="ctr" indent="0" marL="0">
+              <a:buNone/>
+            </a:pPr>
+            <a:r>
+              <a:rPr lang="en-US" sz="2200" dirty="0">
+                <a:solidFill>
+                  <a:srgbClr val="000000"/>
+                </a:solidFill>
+                <a:latin typeface="Arial" pitchFamily="34" charset="0"/>
+                <a:ea typeface="Arial" pitchFamily="34" charset="-122"/>
+                <a:cs typeface="Arial" pitchFamily="34" charset="-120"/>
+              </a:rPr>
+              <a:t>(</a:t>
+            </a:r>
+            <a:endParaRPr lang="en-US" sz="2200" dirty="0"/>
+          </a:p>
+        </p:txBody>
+      </p:sp>
+      <p:sp>
+        <p:nvSpPr>
+          <p:cNvPr id="40" name="Text 38"/>
+          <p:cNvSpPr/>
+          <p:nvPr/>
+        </p:nvSpPr>
+        <p:spPr>
+          <a:xfrm>
+            <a:off x="1270000" y="1003300"/>
+            <a:ext cx="76200" cy="317500"/>
+          </a:xfrm>
+          <a:prstGeom prst="rect">
+            <a:avLst/>
+          </a:prstGeom>
+          <a:noFill/>
+          <a:ln/>
+        </p:spPr>
+        <p:txBody>
+          <a:bodyPr wrap="square" lIns="0" tIns="0" rIns="0" bIns="0" rtlCol="0" anchor="ctr"/>
+          <a:lstStyle/>
+          <a:p>
+            <a:pPr algn="ctr" indent="0" marL="0">
+              <a:buNone/>
+            </a:pPr>
+            <a:r>
+              <a:rPr lang="en-US" sz="2200" dirty="0">
+                <a:solidFill>
+                  <a:srgbClr val="000000"/>
+                </a:solidFill>
+                <a:latin typeface="Arial" pitchFamily="34" charset="0"/>
+                <a:ea typeface="Arial" pitchFamily="34" charset="-122"/>
+                <a:cs typeface="Arial" pitchFamily="34" charset="-120"/>
+              </a:rPr>
+              <a:t>)</a:t>
+            </a:r>
+            <a:endParaRPr lang="en-US" sz="2200" dirty="0"/>
+          </a:p>
+        </p:txBody>
+      </p:sp>
+      <p:sp>
+        <p:nvSpPr>
+          <p:cNvPr id="41" name="Text 39"/>
+          <p:cNvSpPr/>
+          <p:nvPr/>
+        </p:nvSpPr>
+        <p:spPr>
+          <a:xfrm>
+            <a:off x="1384300" y="1003300"/>
+            <a:ext cx="76200" cy="317500"/>
+          </a:xfrm>
+          <a:prstGeom prst="rect">
+            <a:avLst/>
+          </a:prstGeom>
+          <a:noFill/>
+          <a:ln/>
+        </p:spPr>
+        <p:txBody>
+          <a:bodyPr wrap="square" lIns="0" tIns="0" rIns="0" bIns="0" rtlCol="0" anchor="ctr"/>
+          <a:lstStyle/>
+          <a:p>
+            <a:pPr algn="ctr" indent="0" marL="0">
+              <a:buNone/>
+            </a:pPr>
+            <a:r>
+              <a:rPr lang="en-US" sz="2200" dirty="0">
+                <a:solidFill>
+                  <a:srgbClr val="000000"/>
+                </a:solidFill>
+                <a:latin typeface="Arial" pitchFamily="34" charset="0"/>
+                <a:ea typeface="Arial" pitchFamily="34" charset="-122"/>
+                <a:cs typeface="Arial" pitchFamily="34" charset="-120"/>
+              </a:rPr>
+              <a:t>(</a:t>
+            </a:r>
+            <a:endParaRPr lang="en-US" sz="2200" dirty="0"/>
+          </a:p>
+        </p:txBody>
+      </p:sp>
+      <p:sp>
+        <p:nvSpPr>
+          <p:cNvPr id="42" name="Text 40"/>
+          <p:cNvSpPr/>
+          <p:nvPr/>
+        </p:nvSpPr>
+        <p:spPr>
+          <a:xfrm>
+            <a:off x="1562100" y="1003300"/>
+            <a:ext cx="76200" cy="317500"/>
+          </a:xfrm>
+          <a:prstGeom prst="rect">
+            <a:avLst/>
+          </a:prstGeom>
+          <a:noFill/>
+          <a:ln/>
+        </p:spPr>
+        <p:txBody>
+          <a:bodyPr wrap="square" lIns="0" tIns="0" rIns="0" bIns="0" rtlCol="0" anchor="ctr"/>
+          <a:lstStyle/>
+          <a:p>
+            <a:pPr algn="ctr" indent="0" marL="0">
+              <a:buNone/>
+            </a:pPr>
+            <a:r>
+              <a:rPr lang="en-US" sz="2200" dirty="0">
+                <a:solidFill>
+                  <a:srgbClr val="000000"/>
+                </a:solidFill>
+                <a:latin typeface="Arial" pitchFamily="34" charset="0"/>
+                <a:ea typeface="Arial" pitchFamily="34" charset="-122"/>
+                <a:cs typeface="Arial" pitchFamily="34" charset="-120"/>
+              </a:rPr>
+              <a:t>)</a:t>
+            </a:r>
+            <a:endParaRPr lang="en-US" sz="2200" dirty="0"/>
+          </a:p>
+        </p:txBody>
+      </p:sp>
+      <p:sp>
+        <p:nvSpPr>
+          <p:cNvPr id="43" name="Text 41"/>
+          <p:cNvSpPr/>
+          <p:nvPr/>
+        </p:nvSpPr>
+        <p:spPr>
+          <a:xfrm>
+            <a:off x="1663700" y="1003300"/>
+            <a:ext cx="76200" cy="317500"/>
+          </a:xfrm>
+          <a:prstGeom prst="rect">
+            <a:avLst/>
+          </a:prstGeom>
+          <a:noFill/>
+          <a:ln/>
+        </p:spPr>
+        <p:txBody>
+          <a:bodyPr wrap="square" lIns="0" tIns="0" rIns="0" bIns="0" rtlCol="0" anchor="ctr"/>
+          <a:lstStyle/>
+          <a:p>
+            <a:pPr algn="ctr" indent="0" marL="0">
+              <a:buNone/>
+            </a:pPr>
+            <a:r>
+              <a:rPr lang="en-US" sz="2200" dirty="0">
+                <a:solidFill>
+                  <a:srgbClr val="000000"/>
+                </a:solidFill>
+                <a:latin typeface="Arial" pitchFamily="34" charset="0"/>
+                <a:ea typeface="Arial" pitchFamily="34" charset="-122"/>
+                <a:cs typeface="Arial" pitchFamily="34" charset="-120"/>
+              </a:rPr>
+              <a:t>(</a:t>
+            </a:r>
+            <a:endParaRPr lang="en-US" sz="2200" dirty="0"/>
+          </a:p>
+        </p:txBody>
+      </p:sp>
+      <p:sp>
+        <p:nvSpPr>
+          <p:cNvPr id="44" name="Text 42"/>
+          <p:cNvSpPr/>
+          <p:nvPr/>
+        </p:nvSpPr>
+        <p:spPr>
+          <a:xfrm>
+            <a:off x="1841500" y="1003300"/>
+            <a:ext cx="76200" cy="317500"/>
+          </a:xfrm>
+          <a:prstGeom prst="rect">
+            <a:avLst/>
+          </a:prstGeom>
+          <a:noFill/>
+          <a:ln/>
+        </p:spPr>
+        <p:txBody>
+          <a:bodyPr wrap="square" lIns="0" tIns="0" rIns="0" bIns="0" rtlCol="0" anchor="ctr"/>
+          <a:lstStyle/>
+          <a:p>
+            <a:pPr algn="ctr" indent="0" marL="0">
+              <a:buNone/>
+            </a:pPr>
+            <a:r>
+              <a:rPr lang="en-US" sz="2200" dirty="0">
+                <a:solidFill>
+                  <a:srgbClr val="000000"/>
+                </a:solidFill>
+                <a:latin typeface="Arial" pitchFamily="34" charset="0"/>
+                <a:ea typeface="Arial" pitchFamily="34" charset="-122"/>
+                <a:cs typeface="Arial" pitchFamily="34" charset="-120"/>
+              </a:rPr>
+              <a:t>)</a:t>
+            </a:r>
+            <a:endParaRPr lang="en-US" sz="2200" dirty="0"/>
+          </a:p>
+        </p:txBody>
+      </p:sp>
+      <p:sp>
+        <p:nvSpPr>
+          <p:cNvPr id="45" name="Text 43"/>
+          <p:cNvSpPr/>
+          <p:nvPr/>
+        </p:nvSpPr>
+        <p:spPr>
+          <a:xfrm>
+            <a:off x="1955800" y="1003300"/>
+            <a:ext cx="76200" cy="317500"/>
+          </a:xfrm>
+          <a:prstGeom prst="rect">
+            <a:avLst/>
+          </a:prstGeom>
+          <a:noFill/>
+          <a:ln/>
+        </p:spPr>
+        <p:txBody>
+          <a:bodyPr wrap="square" lIns="0" tIns="0" rIns="0" bIns="0" rtlCol="0" anchor="ctr"/>
+          <a:lstStyle/>
+          <a:p>
+            <a:pPr algn="ctr" indent="0" marL="0">
+              <a:buNone/>
+            </a:pPr>
+            <a:r>
+              <a:rPr lang="en-US" sz="2200" dirty="0">
+                <a:solidFill>
+                  <a:srgbClr val="000000"/>
+                </a:solidFill>
+                <a:latin typeface="Arial" pitchFamily="34" charset="0"/>
+                <a:ea typeface="Arial" pitchFamily="34" charset="-122"/>
+                <a:cs typeface="Arial" pitchFamily="34" charset="-120"/>
+              </a:rPr>
+              <a:t>(</a:t>
+            </a:r>
+            <a:endParaRPr lang="en-US" sz="2200" dirty="0"/>
+          </a:p>
+        </p:txBody>
+      </p:sp>
+      <p:sp>
+        <p:nvSpPr>
+          <p:cNvPr id="46" name="Text 44"/>
+          <p:cNvSpPr/>
+          <p:nvPr/>
+        </p:nvSpPr>
+        <p:spPr>
+          <a:xfrm>
+            <a:off x="2133600" y="1003300"/>
+            <a:ext cx="76200" cy="317500"/>
+          </a:xfrm>
+          <a:prstGeom prst="rect">
+            <a:avLst/>
+          </a:prstGeom>
+          <a:noFill/>
+          <a:ln/>
+        </p:spPr>
+        <p:txBody>
+          <a:bodyPr wrap="square" lIns="0" tIns="0" rIns="0" bIns="0" rtlCol="0" anchor="ctr"/>
+          <a:lstStyle/>
+          <a:p>
+            <a:pPr algn="ctr" indent="0" marL="0">
+              <a:buNone/>
+            </a:pPr>
+            <a:r>
+              <a:rPr lang="en-US" sz="2200" dirty="0">
+                <a:solidFill>
+                  <a:srgbClr val="000000"/>
+                </a:solidFill>
+                <a:latin typeface="Arial" pitchFamily="34" charset="0"/>
+                <a:ea typeface="Arial" pitchFamily="34" charset="-122"/>
+                <a:cs typeface="Arial" pitchFamily="34" charset="-120"/>
+              </a:rPr>
+              <a:t>)</a:t>
+            </a:r>
+            <a:endParaRPr lang="en-US" sz="2200" dirty="0"/>
+          </a:p>
+        </p:txBody>
+      </p:sp>
+      <p:sp>
+        <p:nvSpPr>
+          <p:cNvPr id="47" name="Text 45"/>
+          <p:cNvSpPr/>
+          <p:nvPr/>
+        </p:nvSpPr>
+        <p:spPr>
+          <a:xfrm>
+            <a:off x="2247900" y="1003300"/>
+            <a:ext cx="76200" cy="317500"/>
+          </a:xfrm>
+          <a:prstGeom prst="rect">
+            <a:avLst/>
+          </a:prstGeom>
+          <a:noFill/>
+          <a:ln/>
+        </p:spPr>
+        <p:txBody>
+          <a:bodyPr wrap="square" lIns="0" tIns="0" rIns="0" bIns="0" rtlCol="0" anchor="ctr"/>
+          <a:lstStyle/>
+          <a:p>
+            <a:pPr algn="ctr" indent="0" marL="0">
+              <a:buNone/>
+            </a:pPr>
+            <a:r>
+              <a:rPr lang="en-US" sz="2200" dirty="0">
+                <a:solidFill>
+                  <a:srgbClr val="000000"/>
+                </a:solidFill>
+                <a:latin typeface="Arial" pitchFamily="34" charset="0"/>
+                <a:ea typeface="Arial" pitchFamily="34" charset="-122"/>
+                <a:cs typeface="Arial" pitchFamily="34" charset="-120"/>
+              </a:rPr>
+              <a:t>(</a:t>
+            </a:r>
+            <a:endParaRPr lang="en-US" sz="2200" dirty="0"/>
+          </a:p>
+        </p:txBody>
+      </p:sp>
+      <p:sp>
+        <p:nvSpPr>
+          <p:cNvPr id="48" name="Text 46"/>
+          <p:cNvSpPr/>
+          <p:nvPr/>
+        </p:nvSpPr>
+        <p:spPr>
+          <a:xfrm>
+            <a:off x="2425700" y="1003300"/>
+            <a:ext cx="76200" cy="317500"/>
+          </a:xfrm>
+          <a:prstGeom prst="rect">
+            <a:avLst/>
+          </a:prstGeom>
+          <a:noFill/>
+          <a:ln/>
+        </p:spPr>
+        <p:txBody>
+          <a:bodyPr wrap="square" lIns="0" tIns="0" rIns="0" bIns="0" rtlCol="0" anchor="ctr"/>
+          <a:lstStyle/>
+          <a:p>
+            <a:pPr algn="ctr" indent="0" marL="0">
+              <a:buNone/>
+            </a:pPr>
+            <a:r>
+              <a:rPr lang="en-US" sz="2200" dirty="0">
+                <a:solidFill>
+                  <a:srgbClr val="000000"/>
+                </a:solidFill>
+                <a:latin typeface="Arial" pitchFamily="34" charset="0"/>
+                <a:ea typeface="Arial" pitchFamily="34" charset="-122"/>
+                <a:cs typeface="Arial" pitchFamily="34" charset="-120"/>
+              </a:rPr>
+              <a:t>)</a:t>
+            </a:r>
+            <a:endParaRPr lang="en-US" sz="2200" dirty="0"/>
+          </a:p>
+        </p:txBody>
+      </p:sp>
+      <p:sp>
+        <p:nvSpPr>
+          <p:cNvPr id="49" name="Text 47"/>
+          <p:cNvSpPr/>
+          <p:nvPr/>
+        </p:nvSpPr>
+        <p:spPr>
+          <a:xfrm>
+            <a:off x="2527300" y="1003300"/>
+            <a:ext cx="76200" cy="317500"/>
+          </a:xfrm>
+          <a:prstGeom prst="rect">
+            <a:avLst/>
+          </a:prstGeom>
+          <a:noFill/>
+          <a:ln/>
+        </p:spPr>
+        <p:txBody>
+          <a:bodyPr wrap="square" lIns="0" tIns="0" rIns="0" bIns="0" rtlCol="0" anchor="ctr"/>
+          <a:lstStyle/>
+          <a:p>
+            <a:pPr algn="ctr" indent="0" marL="0">
+              <a:buNone/>
+            </a:pPr>
+            <a:r>
+              <a:rPr lang="en-US" sz="2200" dirty="0">
+                <a:solidFill>
+                  <a:srgbClr val="000000"/>
+                </a:solidFill>
+                <a:latin typeface="Arial" pitchFamily="34" charset="0"/>
+                <a:ea typeface="Arial" pitchFamily="34" charset="-122"/>
+                <a:cs typeface="Arial" pitchFamily="34" charset="-120"/>
+              </a:rPr>
+              <a:t>(</a:t>
+            </a:r>
+            <a:endParaRPr lang="en-US" sz="2200" dirty="0"/>
+          </a:p>
+        </p:txBody>
+      </p:sp>
+      <p:sp>
+        <p:nvSpPr>
+          <p:cNvPr id="50" name="Text 48"/>
+          <p:cNvSpPr/>
+          <p:nvPr/>
+        </p:nvSpPr>
+        <p:spPr>
+          <a:xfrm>
+            <a:off x="2705100" y="1003300"/>
+            <a:ext cx="76200" cy="317500"/>
+          </a:xfrm>
+          <a:prstGeom prst="rect">
+            <a:avLst/>
+          </a:prstGeom>
+          <a:noFill/>
+          <a:ln/>
+        </p:spPr>
+        <p:txBody>
+          <a:bodyPr wrap="square" lIns="0" tIns="0" rIns="0" bIns="0" rtlCol="0" anchor="ctr"/>
+          <a:lstStyle/>
+          <a:p>
+            <a:pPr algn="ctr" indent="0" marL="0">
+              <a:buNone/>
+            </a:pPr>
+            <a:r>
+              <a:rPr lang="en-US" sz="2200" dirty="0">
+                <a:solidFill>
+                  <a:srgbClr val="000000"/>
+                </a:solidFill>
+                <a:latin typeface="Arial" pitchFamily="34" charset="0"/>
+                <a:ea typeface="Arial" pitchFamily="34" charset="-122"/>
+                <a:cs typeface="Arial" pitchFamily="34" charset="-120"/>
+              </a:rPr>
+              <a:t>)</a:t>
+            </a:r>
+            <a:endParaRPr lang="en-US" sz="2200" dirty="0"/>
+          </a:p>
+        </p:txBody>
+      </p:sp>
+      <p:sp>
+        <p:nvSpPr>
+          <p:cNvPr id="51" name="Text 49"/>
+          <p:cNvSpPr/>
+          <p:nvPr/>
+        </p:nvSpPr>
+        <p:spPr>
+          <a:xfrm>
+            <a:off x="6858000" y="1066800"/>
+            <a:ext cx="1143000" cy="177800"/>
+          </a:xfrm>
+          <a:prstGeom prst="rect">
+            <a:avLst/>
+          </a:prstGeom>
+          <a:noFill/>
+          <a:ln/>
+        </p:spPr>
+        <p:txBody>
+          <a:bodyPr wrap="square" lIns="0" tIns="0" rIns="0" bIns="0" rtlCol="0" anchor="ctr"/>
+          <a:lstStyle/>
+          <a:p>
+            <a:pPr algn="l" indent="0" marL="0">
+              <a:buNone/>
+            </a:pPr>
+            <a:r>
+              <a:rPr lang="en-US" sz="900" i="1" dirty="0">
+                <a:solidFill>
+                  <a:srgbClr val="000000"/>
+                </a:solidFill>
+                <a:latin typeface="Arial" pitchFamily="34" charset="0"/>
+                <a:ea typeface="Arial" pitchFamily="34" charset="-122"/>
+                <a:cs typeface="Arial" pitchFamily="34" charset="-120"/>
+              </a:rPr>
+              <a:t>Check classes of</a:t>
+            </a:r>
+            <a:endParaRPr lang="en-US" sz="900" dirty="0"/>
+          </a:p>
+        </p:txBody>
+      </p:sp>
       <p:pic>
         <p:nvPicPr>
-          <p:cNvPr id="10" name="Image 0" descr="/workspaces/codespaces-blank/ai_llm_slides/videos/machine-learning/03_ridger_regression_gradient_descent/recreated_pptx/build/assets/eq_initial_w_col.png">    </p:cNvPr>
+          <p:cNvPr id="52" name="Image 0" descr="/home/ahmed/Projects/ai_llm_slides/videos/machine-learning/03_ridger_regression_gradient_descent/recreated_pptx/build/assets/eq_initial_w_col.png">    </p:cNvPr>
           <p:cNvPicPr>
             <a:picLocks noChangeAspect="1"/>
           </p:cNvPicPr>
@@ -2443,7 +2756,7 @@
       </p:pic>
       <p:sp>
         <p:nvSpPr>
-          <p:cNvPr id="11" name="Text 7"/>
+          <p:cNvPr id="53" name="Text 50"/>
           <p:cNvSpPr/>
           <p:nvPr/>
         </p:nvSpPr>
@@ -2469,7 +2782,7 @@
               <a:buNone/>
             </a:pPr>
             <a:r>
-              <a:rPr lang="en-US" sz="1300" i="1" dirty="0">
+              <a:rPr lang="en-US" sz="1300" i="1" u="sng" dirty="0">
                 <a:solidFill>
                   <a:srgbClr val="000000"/>
                 </a:solidFill>
@@ -2485,7 +2798,7 @@
       </p:sp>
       <p:sp>
         <p:nvSpPr>
-          <p:cNvPr id="12" name="Text 8"/>
+          <p:cNvPr id="54" name="Text 51"/>
           <p:cNvSpPr/>
           <p:nvPr/>
         </p:nvSpPr>
@@ -2511,7 +2824,7 @@
               <a:buNone/>
             </a:pPr>
             <a:r>
-              <a:rPr lang="en-US" sz="1200" b="1" dirty="0">
+              <a:rPr lang="en-US" sz="1200" b="1" i="1" u="sng" dirty="0">
                 <a:solidFill>
                   <a:srgbClr val="FF0000"/>
                 </a:solidFill>
@@ -2527,7 +2840,7 @@
       </p:sp>
       <p:sp>
         <p:nvSpPr>
-          <p:cNvPr id="13" name="Text 9"/>
+          <p:cNvPr id="55" name="Text 52"/>
           <p:cNvSpPr/>
           <p:nvPr/>
         </p:nvSpPr>
@@ -2589,7 +2902,7 @@
             <a:r>
               <a:rPr lang="en-US" sz="1350" b="1" dirty="0">
                 <a:solidFill>
-                  <a:srgbClr val="FF0000"/>
+                  <a:srgbClr val="1F1655"/>
                 </a:solidFill>
                 <a:latin typeface="Arial" pitchFamily="34" charset="0"/>
                 <a:ea typeface="Arial" pitchFamily="34" charset="-122"/>
@@ -2654,7 +2967,7 @@
       </p:sp>
       <p:graphicFrame>
         <p:nvGraphicFramePr>
-          <p:cNvPr id="3" name="Table 1"/>
+          <p:cNvPr id="2" name="Table 0"/>
           <p:cNvGraphicFramePr>
             <a:graphicFrameLocks noGrp="1"/>
           </p:cNvGraphicFramePr>
@@ -3087,7 +3400,7 @@
       </p:graphicFrame>
       <p:sp>
         <p:nvSpPr>
-          <p:cNvPr id="15" name="Shape 10"/>
+          <p:cNvPr id="57" name="Shape 53"/>
           <p:cNvSpPr/>
           <p:nvPr/>
         </p:nvSpPr>
@@ -3112,7 +3425,7 @@
       </p:sp>
       <p:sp>
         <p:nvSpPr>
-          <p:cNvPr id="16" name="Text 11"/>
+          <p:cNvPr id="58" name="Text 54"/>
           <p:cNvSpPr/>
           <p:nvPr/>
         </p:nvSpPr>
@@ -3138,7 +3451,7 @@
               <a:buNone/>
             </a:pPr>
             <a:r>
-              <a:rPr lang="en-US" sz="1200" dirty="0">
+              <a:rPr lang="en-US" sz="1100" dirty="0">
                 <a:solidFill>
                   <a:srgbClr val="000000"/>
                 </a:solidFill>
@@ -3148,13 +3461,13 @@
               </a:rPr>
               <a:t>Ugmented Vectors (from Top)</a:t>
             </a:r>
-            <a:endParaRPr lang="en-US" sz="1200" dirty="0"/>
+            <a:endParaRPr lang="en-US" sz="1100" dirty="0"/>
           </a:p>
         </p:txBody>
       </p:sp>
       <p:graphicFrame>
         <p:nvGraphicFramePr>
-          <p:cNvPr id="4" name="Table 2"/>
+          <p:cNvPr id="3" name="Table 1"/>
           <p:cNvGraphicFramePr>
             <a:graphicFrameLocks noGrp="1"/>
           </p:cNvGraphicFramePr>
@@ -4518,7 +4831,7 @@
       </p:graphicFrame>
       <p:sp>
         <p:nvSpPr>
-          <p:cNvPr id="18" name="Shape 12"/>
+          <p:cNvPr id="60" name="Shape 55"/>
           <p:cNvSpPr/>
           <p:nvPr/>
         </p:nvSpPr>
@@ -4538,7 +4851,7 @@
       </p:sp>
       <p:sp>
         <p:nvSpPr>
-          <p:cNvPr id="19" name="Shape 13"/>
+          <p:cNvPr id="61" name="Shape 56"/>
           <p:cNvSpPr/>
           <p:nvPr/>
         </p:nvSpPr>
@@ -4558,7 +4871,7 @@
       </p:sp>
       <p:sp>
         <p:nvSpPr>
-          <p:cNvPr id="20" name="Shape 14"/>
+          <p:cNvPr id="62" name="Shape 57"/>
           <p:cNvSpPr/>
           <p:nvPr/>
         </p:nvSpPr>
@@ -4578,7 +4891,7 @@
       </p:sp>
       <p:sp>
         <p:nvSpPr>
-          <p:cNvPr id="21" name="Shape 15"/>
+          <p:cNvPr id="63" name="Shape 58"/>
           <p:cNvSpPr/>
           <p:nvPr/>
         </p:nvSpPr>
@@ -4598,7 +4911,7 @@
       </p:sp>
       <p:sp>
         <p:nvSpPr>
-          <p:cNvPr id="22" name="Shape 16"/>
+          <p:cNvPr id="64" name="Shape 59"/>
           <p:cNvSpPr/>
           <p:nvPr/>
         </p:nvSpPr>
@@ -4618,7 +4931,7 @@
       </p:sp>
       <p:sp>
         <p:nvSpPr>
-          <p:cNvPr id="23" name="Shape 17"/>
+          <p:cNvPr id="65" name="Shape 60"/>
           <p:cNvSpPr/>
           <p:nvPr/>
         </p:nvSpPr>
@@ -4638,7 +4951,7 @@
       </p:sp>
       <p:sp>
         <p:nvSpPr>
-          <p:cNvPr id="24" name="Shape 18"/>
+          <p:cNvPr id="66" name="Shape 61"/>
           <p:cNvSpPr/>
           <p:nvPr/>
         </p:nvSpPr>
@@ -4658,7 +4971,7 @@
       </p:sp>
       <p:sp>
         <p:nvSpPr>
-          <p:cNvPr id="25" name="Shape 19"/>
+          <p:cNvPr id="67" name="Shape 62"/>
           <p:cNvSpPr/>
           <p:nvPr/>
         </p:nvSpPr>
@@ -4678,7 +4991,7 @@
       </p:sp>
       <p:sp>
         <p:nvSpPr>
-          <p:cNvPr id="26" name="Shape 20"/>
+          <p:cNvPr id="68" name="Shape 63"/>
           <p:cNvSpPr/>
           <p:nvPr/>
         </p:nvSpPr>
@@ -4698,7 +5011,7 @@
       </p:sp>
       <p:sp>
         <p:nvSpPr>
-          <p:cNvPr id="27" name="Shape 21"/>
+          <p:cNvPr id="69" name="Shape 64"/>
           <p:cNvSpPr/>
           <p:nvPr/>
         </p:nvSpPr>
@@ -4718,7 +5031,7 @@
       </p:sp>
       <p:sp>
         <p:nvSpPr>
-          <p:cNvPr id="28" name="Shape 22"/>
+          <p:cNvPr id="70" name="Shape 65"/>
           <p:cNvSpPr/>
           <p:nvPr/>
         </p:nvSpPr>
@@ -4738,7 +5051,7 @@
       </p:sp>
       <p:sp>
         <p:nvSpPr>
-          <p:cNvPr id="29" name="Shape 23"/>
+          <p:cNvPr id="71" name="Shape 66"/>
           <p:cNvSpPr/>
           <p:nvPr/>
         </p:nvSpPr>
@@ -4758,7 +5071,7 @@
       </p:sp>
       <p:sp>
         <p:nvSpPr>
-          <p:cNvPr id="30" name="Shape 24"/>
+          <p:cNvPr id="72" name="Shape 67"/>
           <p:cNvSpPr/>
           <p:nvPr/>
         </p:nvSpPr>
@@ -4783,7 +5096,7 @@
       </p:sp>
       <p:sp>
         <p:nvSpPr>
-          <p:cNvPr id="31" name="Text 25"/>
+          <p:cNvPr id="73" name="Text 68"/>
           <p:cNvSpPr/>
           <p:nvPr/>
         </p:nvSpPr>
@@ -4822,7 +5135,7 @@
       </p:sp>
       <p:sp>
         <p:nvSpPr>
-          <p:cNvPr id="32" name="Shape 26"/>
+          <p:cNvPr id="74" name="Shape 69"/>
           <p:cNvSpPr/>
           <p:nvPr/>
         </p:nvSpPr>
@@ -4847,7 +5160,7 @@
       </p:sp>
       <p:pic>
         <p:nvPicPr>
-          <p:cNvPr id="33" name="Image 1" descr="/workspaces/codespaces-blank/ai_llm_slides/videos/machine-learning/03_ridger_regression_gradient_descent/recreated_pptx/build/assets/eq_r1_l.png">    </p:cNvPr>
+          <p:cNvPr id="75" name="Image 1" descr="/home/ahmed/Projects/ai_llm_slides/videos/machine-learning/03_ridger_regression_gradient_descent/recreated_pptx/build/assets/eq_r1_l.png">    </p:cNvPr>
           <p:cNvPicPr>
             <a:picLocks noChangeAspect="1"/>
           </p:cNvPicPr>
@@ -4861,8 +5174,8 @@
         </p:blipFill>
         <p:spPr>
           <a:xfrm>
-            <a:off x="3822700" y="2035557"/>
-            <a:ext cx="1626105" cy="256032"/>
+            <a:off x="3822700" y="1886203"/>
+            <a:ext cx="1626105" cy="495303"/>
           </a:xfrm>
           <a:prstGeom prst="rect">
             <a:avLst/>
@@ -4871,7 +5184,7 @@
       </p:pic>
       <p:sp>
         <p:nvSpPr>
-          <p:cNvPr id="34" name="Text 27"/>
+          <p:cNvPr id="76" name="Text 70"/>
           <p:cNvSpPr/>
           <p:nvPr/>
         </p:nvSpPr>
@@ -4910,7 +5223,7 @@
       </p:sp>
       <p:sp>
         <p:nvSpPr>
-          <p:cNvPr id="35" name="Text 28"/>
+          <p:cNvPr id="77" name="Text 71"/>
           <p:cNvSpPr/>
           <p:nvPr/>
         </p:nvSpPr>
@@ -4952,7 +5265,7 @@
       </p:sp>
       <p:pic>
         <p:nvPicPr>
-          <p:cNvPr id="36" name="Image 2" descr="/workspaces/codespaces-blank/ai_llm_slides/videos/machine-learning/03_ridger_regression_gradient_descent/recreated_pptx/build/assets/eq_r1_w.png">    </p:cNvPr>
+          <p:cNvPr id="78" name="Image 2" descr="/home/ahmed/Projects/ai_llm_slides/videos/machine-learning/03_ridger_regression_gradient_descent/recreated_pptx/build/assets/eq_r1_w.png">    </p:cNvPr>
           <p:cNvPicPr>
             <a:picLocks noChangeAspect="1"/>
           </p:cNvPicPr>
@@ -4966,8 +5279,8 @@
         </p:blipFill>
         <p:spPr>
           <a:xfrm>
-            <a:off x="7835900" y="1966973"/>
-            <a:ext cx="2311905" cy="367287"/>
+            <a:off x="7835900" y="1637798"/>
+            <a:ext cx="2311905" cy="890013"/>
           </a:xfrm>
           <a:prstGeom prst="rect">
             <a:avLst/>
@@ -4976,7 +5289,7 @@
       </p:pic>
       <p:sp>
         <p:nvSpPr>
-          <p:cNvPr id="37" name="Shape 29"/>
+          <p:cNvPr id="79" name="Shape 72"/>
           <p:cNvSpPr/>
           <p:nvPr/>
         </p:nvSpPr>
@@ -5001,7 +5314,7 @@
       </p:sp>
       <p:pic>
         <p:nvPicPr>
-          <p:cNvPr id="38" name="Image 3" descr="/workspaces/codespaces-blank/ai_llm_slides/videos/machine-learning/03_ridger_regression_gradient_descent/recreated_pptx/build/assets/eq_r2_l.png">    </p:cNvPr>
+          <p:cNvPr id="80" name="Image 3" descr="/home/ahmed/Projects/ai_llm_slides/videos/machine-learning/03_ridger_regression_gradient_descent/recreated_pptx/build/assets/eq_r2_l.png">    </p:cNvPr>
           <p:cNvPicPr>
             <a:picLocks noChangeAspect="1"/>
           </p:cNvPicPr>
@@ -5015,8 +5328,8 @@
         </p:blipFill>
         <p:spPr>
           <a:xfrm>
-            <a:off x="3822700" y="2881633"/>
-            <a:ext cx="1626105" cy="254505"/>
+            <a:off x="3822700" y="2730755"/>
+            <a:ext cx="1626105" cy="492249"/>
           </a:xfrm>
           <a:prstGeom prst="rect">
             <a:avLst/>
@@ -5025,7 +5338,7 @@
       </p:pic>
       <p:sp>
         <p:nvSpPr>
-          <p:cNvPr id="39" name="Text 30"/>
+          <p:cNvPr id="81" name="Text 73"/>
           <p:cNvSpPr/>
           <p:nvPr/>
         </p:nvSpPr>
@@ -5064,7 +5377,7 @@
       </p:sp>
       <p:sp>
         <p:nvSpPr>
-          <p:cNvPr id="40" name="Text 31"/>
+          <p:cNvPr id="82" name="Text 74"/>
           <p:cNvSpPr/>
           <p:nvPr/>
         </p:nvSpPr>
@@ -5106,7 +5419,7 @@
       </p:sp>
       <p:pic>
         <p:nvPicPr>
-          <p:cNvPr id="41" name="Image 4" descr="/workspaces/codespaces-blank/ai_llm_slides/videos/machine-learning/03_ridger_regression_gradient_descent/recreated_pptx/build/assets/eq_r_kw.png">    </p:cNvPr>
+          <p:cNvPr id="83" name="Image 4" descr="/home/ahmed/Projects/ai_llm_slides/videos/machine-learning/03_ridger_regression_gradient_descent/recreated_pptx/build/assets/eq_r_kw.png">    </p:cNvPr>
           <p:cNvPicPr>
             <a:picLocks noChangeAspect="1"/>
           </p:cNvPicPr>
@@ -5120,8 +5433,8 @@
         </p:blipFill>
         <p:spPr>
           <a:xfrm>
-            <a:off x="7835900" y="2707898"/>
-            <a:ext cx="1219197" cy="528825"/>
+            <a:off x="7835900" y="2322316"/>
+            <a:ext cx="1219197" cy="1139955"/>
           </a:xfrm>
           <a:prstGeom prst="rect">
             <a:avLst/>
@@ -5130,7 +5443,7 @@
       </p:pic>
       <p:sp>
         <p:nvSpPr>
-          <p:cNvPr id="42" name="Shape 32"/>
+          <p:cNvPr id="84" name="Shape 75"/>
           <p:cNvSpPr/>
           <p:nvPr/>
         </p:nvSpPr>
@@ -5155,7 +5468,7 @@
       </p:sp>
       <p:pic>
         <p:nvPicPr>
-          <p:cNvPr id="43" name="Image 5" descr="/workspaces/codespaces-blank/ai_llm_slides/videos/machine-learning/03_ridger_regression_gradient_descent/recreated_pptx/build/assets/eq_r3_l.png">    </p:cNvPr>
+          <p:cNvPr id="85" name="Image 5" descr="/home/ahmed/Projects/ai_llm_slides/videos/machine-learning/03_ridger_regression_gradient_descent/recreated_pptx/build/assets/eq_r3_l.png">    </p:cNvPr>
           <p:cNvPicPr>
             <a:picLocks noChangeAspect="1"/>
           </p:cNvPicPr>
@@ -5169,8 +5482,8 @@
         </p:blipFill>
         <p:spPr>
           <a:xfrm>
-            <a:off x="3822700" y="3726183"/>
-            <a:ext cx="1626105" cy="254505"/>
+            <a:off x="3822700" y="3575305"/>
+            <a:ext cx="1626105" cy="492249"/>
           </a:xfrm>
           <a:prstGeom prst="rect">
             <a:avLst/>
@@ -5179,7 +5492,7 @@
       </p:pic>
       <p:sp>
         <p:nvSpPr>
-          <p:cNvPr id="44" name="Text 33"/>
+          <p:cNvPr id="86" name="Text 76"/>
           <p:cNvSpPr/>
           <p:nvPr/>
         </p:nvSpPr>
@@ -5218,7 +5531,7 @@
       </p:sp>
       <p:sp>
         <p:nvSpPr>
-          <p:cNvPr id="45" name="Text 34"/>
+          <p:cNvPr id="87" name="Text 77"/>
           <p:cNvSpPr/>
           <p:nvPr/>
         </p:nvSpPr>
@@ -5260,7 +5573,7 @@
       </p:sp>
       <p:pic>
         <p:nvPicPr>
-          <p:cNvPr id="46" name="Image 6" descr="/workspaces/codespaces-blank/ai_llm_slides/videos/machine-learning/03_ridger_regression_gradient_descent/recreated_pptx/build/assets/eq_r_kw.png">    </p:cNvPr>
+          <p:cNvPr id="88" name="Image 6" descr="/home/ahmed/Projects/ai_llm_slides/videos/machine-learning/03_ridger_regression_gradient_descent/recreated_pptx/build/assets/eq_r_kw.png">    </p:cNvPr>
           <p:cNvPicPr>
             <a:picLocks noChangeAspect="1"/>
           </p:cNvPicPr>
@@ -5274,8 +5587,8 @@
         </p:blipFill>
         <p:spPr>
           <a:xfrm>
-            <a:off x="7835900" y="3552448"/>
-            <a:ext cx="1219197" cy="528825"/>
+            <a:off x="7835900" y="3166866"/>
+            <a:ext cx="1219197" cy="1139955"/>
           </a:xfrm>
           <a:prstGeom prst="rect">
             <a:avLst/>
@@ -5284,7 +5597,7 @@
       </p:pic>
       <p:sp>
         <p:nvSpPr>
-          <p:cNvPr id="47" name="Shape 35"/>
+          <p:cNvPr id="89" name="Shape 78"/>
           <p:cNvSpPr/>
           <p:nvPr/>
         </p:nvSpPr>
@@ -5309,7 +5622,7 @@
       </p:sp>
       <p:pic>
         <p:nvPicPr>
-          <p:cNvPr id="48" name="Image 7" descr="/workspaces/codespaces-blank/ai_llm_slides/videos/machine-learning/03_ridger_regression_gradient_descent/recreated_pptx/build/assets/eq_r4_l.png">    </p:cNvPr>
+          <p:cNvPr id="90" name="Image 7" descr="/home/ahmed/Projects/ai_llm_slides/videos/machine-learning/03_ridger_regression_gradient_descent/recreated_pptx/build/assets/eq_r4_l.png">    </p:cNvPr>
           <p:cNvPicPr>
             <a:picLocks noChangeAspect="1"/>
           </p:cNvPicPr>
@@ -5323,8 +5636,8 @@
         </p:blipFill>
         <p:spPr>
           <a:xfrm>
-            <a:off x="3822700" y="4513324"/>
-            <a:ext cx="1626105" cy="243843"/>
+            <a:off x="3822700" y="4380737"/>
+            <a:ext cx="1626105" cy="454155"/>
           </a:xfrm>
           <a:prstGeom prst="rect">
             <a:avLst/>
@@ -5333,7 +5646,7 @@
       </p:pic>
       <p:sp>
         <p:nvSpPr>
-          <p:cNvPr id="49" name="Text 36"/>
+          <p:cNvPr id="91" name="Text 79"/>
           <p:cNvSpPr/>
           <p:nvPr/>
         </p:nvSpPr>
@@ -5372,7 +5685,7 @@
       </p:sp>
       <p:sp>
         <p:nvSpPr>
-          <p:cNvPr id="50" name="Text 37"/>
+          <p:cNvPr id="92" name="Text 80"/>
           <p:cNvSpPr/>
           <p:nvPr/>
         </p:nvSpPr>
@@ -5414,7 +5727,7 @@
       </p:sp>
       <p:pic>
         <p:nvPicPr>
-          <p:cNvPr id="51" name="Image 8" descr="/workspaces/codespaces-blank/ai_llm_slides/videos/machine-learning/03_ridger_regression_gradient_descent/recreated_pptx/build/assets/eq_r_kw.png">    </p:cNvPr>
+          <p:cNvPr id="93" name="Image 8" descr="/home/ahmed/Projects/ai_llm_slides/videos/machine-learning/03_ridger_regression_gradient_descent/recreated_pptx/build/assets/eq_r_kw.png">    </p:cNvPr>
           <p:cNvPicPr>
             <a:picLocks noChangeAspect="1"/>
           </p:cNvPicPr>
@@ -5428,8 +5741,8 @@
         </p:blipFill>
         <p:spPr>
           <a:xfrm>
-            <a:off x="7835900" y="4333498"/>
-            <a:ext cx="1219197" cy="528825"/>
+            <a:off x="7835900" y="3947916"/>
+            <a:ext cx="1219197" cy="1139955"/>
           </a:xfrm>
           <a:prstGeom prst="rect">
             <a:avLst/>
@@ -5438,7 +5751,7 @@
       </p:pic>
       <p:sp>
         <p:nvSpPr>
-          <p:cNvPr id="52" name="Shape 38"/>
+          <p:cNvPr id="94" name="Shape 81"/>
           <p:cNvSpPr/>
           <p:nvPr/>
         </p:nvSpPr>
@@ -5463,7 +5776,7 @@
       </p:sp>
       <p:pic>
         <p:nvPicPr>
-          <p:cNvPr id="53" name="Image 9" descr="/workspaces/codespaces-blank/ai_llm_slides/videos/machine-learning/03_ridger_regression_gradient_descent/recreated_pptx/build/assets/eq_r5_l.png">    </p:cNvPr>
+          <p:cNvPr id="95" name="Image 9" descr="/home/ahmed/Projects/ai_llm_slides/videos/machine-learning/03_ridger_regression_gradient_descent/recreated_pptx/build/assets/eq_r5_l.png">    </p:cNvPr>
           <p:cNvPicPr>
             <a:picLocks noChangeAspect="1"/>
           </p:cNvPicPr>
@@ -5477,8 +5790,8 @@
         </p:blipFill>
         <p:spPr>
           <a:xfrm>
-            <a:off x="3822700" y="5402324"/>
-            <a:ext cx="1626105" cy="243843"/>
+            <a:off x="3822700" y="5269737"/>
+            <a:ext cx="1626105" cy="454155"/>
           </a:xfrm>
           <a:prstGeom prst="rect">
             <a:avLst/>
@@ -5487,7 +5800,7 @@
       </p:pic>
       <p:sp>
         <p:nvSpPr>
-          <p:cNvPr id="54" name="Text 39"/>
+          <p:cNvPr id="96" name="Text 82"/>
           <p:cNvSpPr/>
           <p:nvPr/>
         </p:nvSpPr>
@@ -5526,7 +5839,7 @@
       </p:sp>
       <p:sp>
         <p:nvSpPr>
-          <p:cNvPr id="55" name="Text 40"/>
+          <p:cNvPr id="97" name="Text 83"/>
           <p:cNvSpPr/>
           <p:nvPr/>
         </p:nvSpPr>
@@ -5568,7 +5881,7 @@
       </p:sp>
       <p:pic>
         <p:nvPicPr>
-          <p:cNvPr id="56" name="Image 10" descr="/workspaces/codespaces-blank/ai_llm_slides/videos/machine-learning/03_ridger_regression_gradient_descent/recreated_pptx/build/assets/eq_r_kw.png">    </p:cNvPr>
+          <p:cNvPr id="98" name="Image 10" descr="/home/ahmed/Projects/ai_llm_slides/videos/machine-learning/03_ridger_regression_gradient_descent/recreated_pptx/build/assets/eq_r_kw.png">    </p:cNvPr>
           <p:cNvPicPr>
             <a:picLocks noChangeAspect="1"/>
           </p:cNvPicPr>
@@ -5582,8 +5895,8 @@
         </p:blipFill>
         <p:spPr>
           <a:xfrm>
-            <a:off x="7835900" y="5222498"/>
-            <a:ext cx="1219197" cy="528825"/>
+            <a:off x="7835900" y="4836916"/>
+            <a:ext cx="1219197" cy="1139955"/>
           </a:xfrm>
           <a:prstGeom prst="rect">
             <a:avLst/>
@@ -5592,7 +5905,7 @@
       </p:pic>
       <p:sp>
         <p:nvSpPr>
-          <p:cNvPr id="57" name="Shape 41"/>
+          <p:cNvPr id="99" name="Shape 84"/>
           <p:cNvSpPr/>
           <p:nvPr/>
         </p:nvSpPr>
@@ -5617,7 +5930,7 @@
       </p:sp>
       <p:pic>
         <p:nvPicPr>
-          <p:cNvPr id="58" name="Image 11" descr="/workspaces/codespaces-blank/ai_llm_slides/videos/machine-learning/03_ridger_regression_gradient_descent/recreated_pptx/build/assets/eq_r6_l.png">    </p:cNvPr>
+          <p:cNvPr id="100" name="Image 11" descr="/home/ahmed/Projects/ai_llm_slides/videos/machine-learning/03_ridger_regression_gradient_descent/recreated_pptx/build/assets/eq_r6_l.png">    </p:cNvPr>
           <p:cNvPicPr>
             <a:picLocks noChangeAspect="1"/>
           </p:cNvPicPr>
@@ -5631,8 +5944,8 @@
         </p:blipFill>
         <p:spPr>
           <a:xfrm>
-            <a:off x="3822700" y="6189724"/>
-            <a:ext cx="1626105" cy="243843"/>
+            <a:off x="3822700" y="6055615"/>
+            <a:ext cx="1626105" cy="455673"/>
           </a:xfrm>
           <a:prstGeom prst="rect">
             <a:avLst/>
@@ -5641,7 +5954,7 @@
       </p:pic>
       <p:sp>
         <p:nvSpPr>
-          <p:cNvPr id="59" name="Text 42"/>
+          <p:cNvPr id="101" name="Text 85"/>
           <p:cNvSpPr/>
           <p:nvPr/>
         </p:nvSpPr>
@@ -5680,7 +5993,7 @@
       </p:sp>
       <p:sp>
         <p:nvSpPr>
-          <p:cNvPr id="60" name="Text 43"/>
+          <p:cNvPr id="102" name="Text 86"/>
           <p:cNvSpPr/>
           <p:nvPr/>
         </p:nvSpPr>
@@ -5722,7 +6035,7 @@
       </p:sp>
       <p:pic>
         <p:nvPicPr>
-          <p:cNvPr id="61" name="Image 12" descr="/workspaces/codespaces-blank/ai_llm_slides/videos/machine-learning/03_ridger_regression_gradient_descent/recreated_pptx/build/assets/eq_r_kw.png">    </p:cNvPr>
+          <p:cNvPr id="103" name="Image 12" descr="/home/ahmed/Projects/ai_llm_slides/videos/machine-learning/03_ridger_regression_gradient_descent/recreated_pptx/build/assets/eq_r_kw.png">    </p:cNvPr>
           <p:cNvPicPr>
             <a:picLocks noChangeAspect="1"/>
           </p:cNvPicPr>
@@ -5736,8 +6049,8 @@
         </p:blipFill>
         <p:spPr>
           <a:xfrm>
-            <a:off x="7835900" y="6009898"/>
-            <a:ext cx="1219197" cy="528825"/>
+            <a:off x="7835900" y="5624316"/>
+            <a:ext cx="1219197" cy="1139955"/>
           </a:xfrm>
           <a:prstGeom prst="rect">
             <a:avLst/>
